--- a/0_Documentation/00 GCC_ImplementationDocuments_8_22_25/GCC_Timeline and Status_8_22_25.pptx
+++ b/0_Documentation/00 GCC_ImplementationDocuments_8_22_25/GCC_Timeline and Status_8_22_25.pptx
@@ -5,31 +5,32 @@
     <p:sldMasterId id="2147483660" r:id="rId1"/>
   </p:sldMasterIdLst>
   <p:notesMasterIdLst>
-    <p:notesMasterId r:id="rId24"/>
+    <p:notesMasterId r:id="rId25"/>
   </p:notesMasterIdLst>
   <p:sldIdLst>
     <p:sldId id="353" r:id="rId2"/>
     <p:sldId id="500" r:id="rId3"/>
     <p:sldId id="517" r:id="rId4"/>
-    <p:sldId id="518" r:id="rId5"/>
+    <p:sldId id="520" r:id="rId5"/>
     <p:sldId id="519" r:id="rId6"/>
-    <p:sldId id="506" r:id="rId7"/>
-    <p:sldId id="354" r:id="rId8"/>
-    <p:sldId id="504" r:id="rId9"/>
-    <p:sldId id="505" r:id="rId10"/>
-    <p:sldId id="376" r:id="rId11"/>
-    <p:sldId id="503" r:id="rId12"/>
-    <p:sldId id="502" r:id="rId13"/>
-    <p:sldId id="508" r:id="rId14"/>
-    <p:sldId id="509" r:id="rId15"/>
-    <p:sldId id="507" r:id="rId16"/>
-    <p:sldId id="510" r:id="rId17"/>
-    <p:sldId id="511" r:id="rId18"/>
-    <p:sldId id="512" r:id="rId19"/>
-    <p:sldId id="513" r:id="rId20"/>
-    <p:sldId id="514" r:id="rId21"/>
-    <p:sldId id="515" r:id="rId22"/>
-    <p:sldId id="516" r:id="rId23"/>
+    <p:sldId id="518" r:id="rId7"/>
+    <p:sldId id="506" r:id="rId8"/>
+    <p:sldId id="354" r:id="rId9"/>
+    <p:sldId id="504" r:id="rId10"/>
+    <p:sldId id="505" r:id="rId11"/>
+    <p:sldId id="376" r:id="rId12"/>
+    <p:sldId id="503" r:id="rId13"/>
+    <p:sldId id="502" r:id="rId14"/>
+    <p:sldId id="508" r:id="rId15"/>
+    <p:sldId id="509" r:id="rId16"/>
+    <p:sldId id="507" r:id="rId17"/>
+    <p:sldId id="510" r:id="rId18"/>
+    <p:sldId id="511" r:id="rId19"/>
+    <p:sldId id="512" r:id="rId20"/>
+    <p:sldId id="513" r:id="rId21"/>
+    <p:sldId id="514" r:id="rId22"/>
+    <p:sldId id="515" r:id="rId23"/>
+    <p:sldId id="516" r:id="rId24"/>
   </p:sldIdLst>
   <p:sldSz cx="12192000" cy="6858000"/>
   <p:notesSz cx="7315200" cy="9601200"/>
@@ -136,8 +137,9 @@
             <p14:sldId id="353"/>
             <p14:sldId id="500"/>
             <p14:sldId id="517"/>
+            <p14:sldId id="520"/>
+            <p14:sldId id="519"/>
             <p14:sldId id="518"/>
-            <p14:sldId id="519"/>
             <p14:sldId id="506"/>
             <p14:sldId id="354"/>
             <p14:sldId id="504"/>
@@ -182,7 +184,7 @@
 <file path=ppt/revisionInfo.xml><?xml version="1.0" encoding="utf-8"?>
 <p1510:revInfo xmlns:a="http://schemas.openxmlformats.org/drawingml/2006/main" xmlns:r="http://schemas.openxmlformats.org/officeDocument/2006/relationships" xmlns:p1510="http://schemas.microsoft.com/office/powerpoint/2015/10/main">
   <p1510:revLst>
-    <p1510:client id="{502E98C1-975B-4C67-B5ED-3E9D2CA9E44A}" v="16" dt="2025-08-22T05:22:41.425"/>
+    <p1510:client id="{502E98C1-975B-4C67-B5ED-3E9D2CA9E44A}" v="24" dt="2025-08-25T19:21:40.633"/>
   </p1510:revLst>
 </p1510:revInfo>
 </file>
@@ -192,7 +194,7 @@
   <pc:docChgLst>
     <pc:chgData name="Shawn West" userId="bcaf3c6b-bfc1-40d2-81dc-c3fa941236d7" providerId="ADAL" clId="{502E98C1-975B-4C67-B5ED-3E9D2CA9E44A}"/>
     <pc:docChg chg="undo custSel addSld modSld sldOrd addSection modSection">
-      <pc:chgData name="Shawn West" userId="bcaf3c6b-bfc1-40d2-81dc-c3fa941236d7" providerId="ADAL" clId="{502E98C1-975B-4C67-B5ED-3E9D2CA9E44A}" dt="2025-08-22T14:02:39.586" v="1489" actId="1076"/>
+      <pc:chgData name="Shawn West" userId="bcaf3c6b-bfc1-40d2-81dc-c3fa941236d7" providerId="ADAL" clId="{502E98C1-975B-4C67-B5ED-3E9D2CA9E44A}" dt="2025-08-25T19:21:40.628" v="1521"/>
       <pc:docMkLst>
         <pc:docMk/>
       </pc:docMkLst>
@@ -208,14 +210,6 @@
             <pc:docMk/>
             <pc:sldMk cId="714305329" sldId="500"/>
             <ac:spMk id="17" creationId="{14CA68B9-88CC-D2B6-812C-49496C773F59}"/>
-          </ac:spMkLst>
-        </pc:spChg>
-        <pc:spChg chg="del mod topLvl">
-          <ac:chgData name="Shawn West" userId="bcaf3c6b-bfc1-40d2-81dc-c3fa941236d7" providerId="ADAL" clId="{502E98C1-975B-4C67-B5ED-3E9D2CA9E44A}" dt="2025-08-22T03:26:44.754" v="295" actId="478"/>
-          <ac:spMkLst>
-            <pc:docMk/>
-            <pc:sldMk cId="714305329" sldId="500"/>
-            <ac:spMk id="18" creationId="{2B78640F-BE72-E289-A7E8-A26C506ED987}"/>
           </ac:spMkLst>
         </pc:spChg>
         <pc:spChg chg="mod topLvl">
@@ -258,14 +252,6 @@
             <ac:spMk id="44" creationId="{A89F0AC9-7D1A-3854-7B70-0CE168446A43}"/>
           </ac:spMkLst>
         </pc:spChg>
-        <pc:grpChg chg="del">
-          <ac:chgData name="Shawn West" userId="bcaf3c6b-bfc1-40d2-81dc-c3fa941236d7" providerId="ADAL" clId="{502E98C1-975B-4C67-B5ED-3E9D2CA9E44A}" dt="2025-08-22T03:23:13.011" v="4" actId="478"/>
-          <ac:grpSpMkLst>
-            <pc:docMk/>
-            <pc:sldMk cId="714305329" sldId="500"/>
-            <ac:grpSpMk id="5" creationId="{4EE3EBBC-1176-3FAF-6244-16B3777A5BD4}"/>
-          </ac:grpSpMkLst>
-        </pc:grpChg>
         <pc:grpChg chg="mod">
           <ac:chgData name="Shawn West" userId="bcaf3c6b-bfc1-40d2-81dc-c3fa941236d7" providerId="ADAL" clId="{502E98C1-975B-4C67-B5ED-3E9D2CA9E44A}" dt="2025-08-22T03:24:15.304" v="77" actId="1038"/>
           <ac:grpSpMkLst>
@@ -280,14 +266,6 @@
             <pc:docMk/>
             <pc:sldMk cId="714305329" sldId="500"/>
             <ac:grpSpMk id="13" creationId="{8F2973AD-16FC-C789-B8D0-8D352D9C889D}"/>
-          </ac:grpSpMkLst>
-        </pc:grpChg>
-        <pc:grpChg chg="del mod topLvl">
-          <ac:chgData name="Shawn West" userId="bcaf3c6b-bfc1-40d2-81dc-c3fa941236d7" providerId="ADAL" clId="{502E98C1-975B-4C67-B5ED-3E9D2CA9E44A}" dt="2025-08-22T03:26:44.754" v="295" actId="478"/>
-          <ac:grpSpMkLst>
-            <pc:docMk/>
-            <pc:sldMk cId="714305329" sldId="500"/>
-            <ac:grpSpMk id="16" creationId="{DC1410A2-1258-EFB0-C066-0080A20F4D4E}"/>
           </ac:grpSpMkLst>
         </pc:grpChg>
         <pc:grpChg chg="mod">
@@ -312,22 +290,6 @@
             <pc:docMk/>
             <pc:sldMk cId="714305329" sldId="500"/>
             <ac:grpSpMk id="40" creationId="{4EB9B165-2009-F0A9-12DA-3AB32AEFC198}"/>
-          </ac:grpSpMkLst>
-        </pc:grpChg>
-        <pc:grpChg chg="del mod">
-          <ac:chgData name="Shawn West" userId="bcaf3c6b-bfc1-40d2-81dc-c3fa941236d7" providerId="ADAL" clId="{502E98C1-975B-4C67-B5ED-3E9D2CA9E44A}" dt="2025-08-22T03:25:25.635" v="146" actId="165"/>
-          <ac:grpSpMkLst>
-            <pc:docMk/>
-            <pc:sldMk cId="714305329" sldId="500"/>
-            <ac:grpSpMk id="41" creationId="{AD42663F-6CF3-7566-08E0-90824A0ECA2B}"/>
-          </ac:grpSpMkLst>
-        </pc:grpChg>
-        <pc:grpChg chg="del">
-          <ac:chgData name="Shawn West" userId="bcaf3c6b-bfc1-40d2-81dc-c3fa941236d7" providerId="ADAL" clId="{502E98C1-975B-4C67-B5ED-3E9D2CA9E44A}" dt="2025-08-22T03:23:14.654" v="5" actId="478"/>
-          <ac:grpSpMkLst>
-            <pc:docMk/>
-            <pc:sldMk cId="714305329" sldId="500"/>
-            <ac:grpSpMk id="77" creationId="{F556D103-676D-B108-17F5-4BB9A33F4A4B}"/>
           </ac:grpSpMkLst>
         </pc:grpChg>
         <pc:grpChg chg="mod">
@@ -511,8 +473,8 @@
           </ac:spMkLst>
         </pc:spChg>
       </pc:sldChg>
-      <pc:sldChg chg="modSp add mod">
-        <pc:chgData name="Shawn West" userId="bcaf3c6b-bfc1-40d2-81dc-c3fa941236d7" providerId="ADAL" clId="{502E98C1-975B-4C67-B5ED-3E9D2CA9E44A}" dt="2025-08-22T06:44:18.165" v="1488" actId="20577"/>
+      <pc:sldChg chg="modSp add mod setBg">
+        <pc:chgData name="Shawn West" userId="bcaf3c6b-bfc1-40d2-81dc-c3fa941236d7" providerId="ADAL" clId="{502E98C1-975B-4C67-B5ED-3E9D2CA9E44A}" dt="2025-08-25T19:21:40.628" v="1521"/>
         <pc:sldMkLst>
           <pc:docMk/>
           <pc:sldMk cId="3735198599" sldId="518"/>
@@ -534,8 +496,8 @@
           </ac:spMkLst>
         </pc:spChg>
       </pc:sldChg>
-      <pc:sldChg chg="modSp add mod">
-        <pc:chgData name="Shawn West" userId="bcaf3c6b-bfc1-40d2-81dc-c3fa941236d7" providerId="ADAL" clId="{502E98C1-975B-4C67-B5ED-3E9D2CA9E44A}" dt="2025-08-22T04:45:21.544" v="1090" actId="21"/>
+      <pc:sldChg chg="modSp add mod ord">
+        <pc:chgData name="Shawn West" userId="bcaf3c6b-bfc1-40d2-81dc-c3fa941236d7" providerId="ADAL" clId="{502E98C1-975B-4C67-B5ED-3E9D2CA9E44A}" dt="2025-08-25T19:15:34.928" v="1512"/>
         <pc:sldMkLst>
           <pc:docMk/>
           <pc:sldMk cId="3611448926" sldId="519"/>
@@ -554,6 +516,45 @@
             <pc:docMk/>
             <pc:sldMk cId="3611448926" sldId="519"/>
             <ac:spMk id="6" creationId="{4B26125E-97D5-C407-D9B2-706930646CAE}"/>
+          </ac:spMkLst>
+        </pc:spChg>
+      </pc:sldChg>
+      <pc:sldChg chg="addSp modSp add mod ord">
+        <pc:chgData name="Shawn West" userId="bcaf3c6b-bfc1-40d2-81dc-c3fa941236d7" providerId="ADAL" clId="{502E98C1-975B-4C67-B5ED-3E9D2CA9E44A}" dt="2025-08-25T19:17:43.549" v="1520"/>
+        <pc:sldMkLst>
+          <pc:docMk/>
+          <pc:sldMk cId="4987962" sldId="520"/>
+        </pc:sldMkLst>
+        <pc:spChg chg="mod">
+          <ac:chgData name="Shawn West" userId="bcaf3c6b-bfc1-40d2-81dc-c3fa941236d7" providerId="ADAL" clId="{502E98C1-975B-4C67-B5ED-3E9D2CA9E44A}" dt="2025-08-25T19:17:43.549" v="1520"/>
+          <ac:spMkLst>
+            <pc:docMk/>
+            <pc:sldMk cId="4987962" sldId="520"/>
+            <ac:spMk id="2" creationId="{C06CF711-0026-BFCF-0DF0-5391626D3A20}"/>
+          </ac:spMkLst>
+        </pc:spChg>
+        <pc:spChg chg="add">
+          <ac:chgData name="Shawn West" userId="bcaf3c6b-bfc1-40d2-81dc-c3fa941236d7" providerId="ADAL" clId="{502E98C1-975B-4C67-B5ED-3E9D2CA9E44A}" dt="2025-08-25T19:16:58.188" v="1515"/>
+          <ac:spMkLst>
+            <pc:docMk/>
+            <pc:sldMk cId="4987962" sldId="520"/>
+            <ac:spMk id="3" creationId="{AC9E051F-48FE-B384-0ED8-8BF6CFC44A4C}"/>
+          </ac:spMkLst>
+        </pc:spChg>
+        <pc:spChg chg="mod">
+          <ac:chgData name="Shawn West" userId="bcaf3c6b-bfc1-40d2-81dc-c3fa941236d7" providerId="ADAL" clId="{502E98C1-975B-4C67-B5ED-3E9D2CA9E44A}" dt="2025-08-25T19:15:30.238" v="1510" actId="20577"/>
+          <ac:spMkLst>
+            <pc:docMk/>
+            <pc:sldMk cId="4987962" sldId="520"/>
+            <ac:spMk id="6" creationId="{026384C2-46C3-2DAA-E672-F688F38E524B}"/>
+          </ac:spMkLst>
+        </pc:spChg>
+        <pc:spChg chg="add">
+          <ac:chgData name="Shawn West" userId="bcaf3c6b-bfc1-40d2-81dc-c3fa941236d7" providerId="ADAL" clId="{502E98C1-975B-4C67-B5ED-3E9D2CA9E44A}" dt="2025-08-25T19:17:03.170" v="1517"/>
+          <ac:spMkLst>
+            <pc:docMk/>
+            <pc:sldMk cId="4987962" sldId="520"/>
+            <ac:spMk id="7" creationId="{EEE21785-E039-B540-B7EE-529EDCBC9C0D}"/>
           </ac:spMkLst>
         </pc:spChg>
       </pc:sldChg>
@@ -643,7 +644,7 @@
           </a:lstStyle>
           <a:p>
             <a:fld id="{1904ED56-815F-4152-9F12-EA9FD3F07DC0}" type="datetimeFigureOut">
-              <a:t>8/21/2025</a:t>
+              <a:t>8/25/2025</a:t>
             </a:fld>
             <a:endParaRPr lang="en-US"/>
           </a:p>
@@ -1022,6 +1023,90 @@
   <p:cSld>
     <p:spTree>
       <p:nvGrpSpPr>
+        <p:cNvPr id="1" name=""/>
+        <p:cNvGrpSpPr/>
+        <p:nvPr/>
+      </p:nvGrpSpPr>
+      <p:grpSpPr>
+        <a:xfrm>
+          <a:off x="0" y="0"/>
+          <a:ext cx="0" cy="0"/>
+          <a:chOff x="0" y="0"/>
+          <a:chExt cx="0" cy="0"/>
+        </a:xfrm>
+      </p:grpSpPr>
+      <p:sp>
+        <p:nvSpPr>
+          <p:cNvPr id="2" name="Slide Image Placeholder 1"/>
+          <p:cNvSpPr>
+            <a:spLocks noGrp="1" noRot="1" noChangeAspect="1"/>
+          </p:cNvSpPr>
+          <p:nvPr>
+            <p:ph type="sldImg"/>
+          </p:nvPr>
+        </p:nvSpPr>
+        <p:spPr/>
+      </p:sp>
+      <p:sp>
+        <p:nvSpPr>
+          <p:cNvPr id="3" name="Notes Placeholder 2"/>
+          <p:cNvSpPr>
+            <a:spLocks noGrp="1"/>
+          </p:cNvSpPr>
+          <p:nvPr>
+            <p:ph type="body" idx="1"/>
+          </p:nvPr>
+        </p:nvSpPr>
+        <p:spPr/>
+        <p:txBody>
+          <a:bodyPr/>
+          <a:lstStyle/>
+          <a:p>
+            <a:endParaRPr lang="en-US" dirty="0"/>
+          </a:p>
+        </p:txBody>
+      </p:sp>
+      <p:sp>
+        <p:nvSpPr>
+          <p:cNvPr id="4" name="Slide Number Placeholder 3"/>
+          <p:cNvSpPr>
+            <a:spLocks noGrp="1"/>
+          </p:cNvSpPr>
+          <p:nvPr>
+            <p:ph type="sldNum" sz="quarter" idx="5"/>
+          </p:nvPr>
+        </p:nvSpPr>
+        <p:spPr/>
+        <p:txBody>
+          <a:bodyPr/>
+          <a:lstStyle/>
+          <a:p>
+            <a:fld id="{AFF60533-1213-4FCB-A4AA-C44494E2E2E7}" type="slidenum">
+              <a:rPr lang="en-US" smtClean="0"/>
+              <a:t>11</a:t>
+            </a:fld>
+            <a:endParaRPr lang="en-US"/>
+          </a:p>
+        </p:txBody>
+      </p:sp>
+    </p:spTree>
+    <p:extLst>
+      <p:ext uri="{BB962C8B-B14F-4D97-AF65-F5344CB8AC3E}">
+        <p14:creationId xmlns:p14="http://schemas.microsoft.com/office/powerpoint/2010/main" val="1184885258"/>
+      </p:ext>
+    </p:extLst>
+  </p:cSld>
+  <p:clrMapOvr>
+    <a:masterClrMapping/>
+  </p:clrMapOvr>
+</p:notes>
+</file>
+
+<file path=ppt/notesSlides/notesSlide11.xml><?xml version="1.0" encoding="utf-8"?>
+<p:notes xmlns:a="http://schemas.openxmlformats.org/drawingml/2006/main" xmlns:r="http://schemas.openxmlformats.org/officeDocument/2006/relationships" xmlns:p="http://schemas.openxmlformats.org/presentationml/2006/main">
+  <p:cSld>
+    <p:spTree>
+      <p:nvGrpSpPr>
         <p:cNvPr id="1" name="">
           <a:extLst>
             <a:ext uri="{FF2B5EF4-FFF2-40B4-BE49-F238E27FC236}">
@@ -1106,7 +1191,7 @@
           <a:p>
             <a:fld id="{AFF60533-1213-4FCB-A4AA-C44494E2E2E7}" type="slidenum">
               <a:rPr lang="en-US" smtClean="0"/>
-              <a:t>11</a:t>
+              <a:t>12</a:t>
             </a:fld>
             <a:endParaRPr lang="en-US"/>
           </a:p>
@@ -1125,7 +1210,7 @@
 </p:notes>
 </file>
 
-<file path=ppt/notesSlides/notesSlide11.xml><?xml version="1.0" encoding="utf-8"?>
+<file path=ppt/notesSlides/notesSlide12.xml><?xml version="1.0" encoding="utf-8"?>
 <p:notes xmlns:a="http://schemas.openxmlformats.org/drawingml/2006/main" xmlns:r="http://schemas.openxmlformats.org/officeDocument/2006/relationships" xmlns:p="http://schemas.openxmlformats.org/presentationml/2006/main">
   <p:cSld>
     <p:spTree>
@@ -1214,7 +1299,7 @@
           <a:p>
             <a:fld id="{AFF60533-1213-4FCB-A4AA-C44494E2E2E7}" type="slidenum">
               <a:rPr lang="en-US" smtClean="0"/>
-              <a:t>12</a:t>
+              <a:t>13</a:t>
             </a:fld>
             <a:endParaRPr lang="en-US"/>
           </a:p>
@@ -1233,7 +1318,7 @@
 </p:notes>
 </file>
 
-<file path=ppt/notesSlides/notesSlide12.xml><?xml version="1.0" encoding="utf-8"?>
+<file path=ppt/notesSlides/notesSlide13.xml><?xml version="1.0" encoding="utf-8"?>
 <p:notes xmlns:a="http://schemas.openxmlformats.org/drawingml/2006/main" xmlns:r="http://schemas.openxmlformats.org/officeDocument/2006/relationships" xmlns:p="http://schemas.openxmlformats.org/presentationml/2006/main">
   <p:cSld>
     <p:spTree>
@@ -1322,7 +1407,7 @@
           <a:p>
             <a:fld id="{AFF60533-1213-4FCB-A4AA-C44494E2E2E7}" type="slidenum">
               <a:rPr lang="en-US" smtClean="0"/>
-              <a:t>14</a:t>
+              <a:t>15</a:t>
             </a:fld>
             <a:endParaRPr lang="en-US"/>
           </a:p>
@@ -1341,7 +1426,7 @@
 </p:notes>
 </file>
 
-<file path=ppt/notesSlides/notesSlide13.xml><?xml version="1.0" encoding="utf-8"?>
+<file path=ppt/notesSlides/notesSlide14.xml><?xml version="1.0" encoding="utf-8"?>
 <p:notes xmlns:a="http://schemas.openxmlformats.org/drawingml/2006/main" xmlns:r="http://schemas.openxmlformats.org/officeDocument/2006/relationships" xmlns:p="http://schemas.openxmlformats.org/presentationml/2006/main">
   <p:cSld>
     <p:spTree>
@@ -1430,7 +1515,7 @@
           <a:p>
             <a:fld id="{AFF60533-1213-4FCB-A4AA-C44494E2E2E7}" type="slidenum">
               <a:rPr lang="en-US" smtClean="0"/>
-              <a:t>15</a:t>
+              <a:t>16</a:t>
             </a:fld>
             <a:endParaRPr lang="en-US"/>
           </a:p>
@@ -1449,7 +1534,7 @@
 </p:notes>
 </file>
 
-<file path=ppt/notesSlides/notesSlide14.xml><?xml version="1.0" encoding="utf-8"?>
+<file path=ppt/notesSlides/notesSlide15.xml><?xml version="1.0" encoding="utf-8"?>
 <p:notes xmlns:a="http://schemas.openxmlformats.org/drawingml/2006/main" xmlns:r="http://schemas.openxmlformats.org/officeDocument/2006/relationships" xmlns:p="http://schemas.openxmlformats.org/presentationml/2006/main">
   <p:cSld>
     <p:spTree>
@@ -1538,7 +1623,7 @@
           <a:p>
             <a:fld id="{AFF60533-1213-4FCB-A4AA-C44494E2E2E7}" type="slidenum">
               <a:rPr lang="en-US" smtClean="0"/>
-              <a:t>16</a:t>
+              <a:t>17</a:t>
             </a:fld>
             <a:endParaRPr lang="en-US"/>
           </a:p>
@@ -1557,7 +1642,7 @@
 </p:notes>
 </file>
 
-<file path=ppt/notesSlides/notesSlide15.xml><?xml version="1.0" encoding="utf-8"?>
+<file path=ppt/notesSlides/notesSlide16.xml><?xml version="1.0" encoding="utf-8"?>
 <p:notes xmlns:a="http://schemas.openxmlformats.org/drawingml/2006/main" xmlns:r="http://schemas.openxmlformats.org/officeDocument/2006/relationships" xmlns:p="http://schemas.openxmlformats.org/presentationml/2006/main">
   <p:cSld>
     <p:spTree>
@@ -1646,7 +1731,7 @@
           <a:p>
             <a:fld id="{AFF60533-1213-4FCB-A4AA-C44494E2E2E7}" type="slidenum">
               <a:rPr lang="en-US" smtClean="0"/>
-              <a:t>17</a:t>
+              <a:t>18</a:t>
             </a:fld>
             <a:endParaRPr lang="en-US"/>
           </a:p>
@@ -1665,7 +1750,7 @@
 </p:notes>
 </file>
 
-<file path=ppt/notesSlides/notesSlide16.xml><?xml version="1.0" encoding="utf-8"?>
+<file path=ppt/notesSlides/notesSlide17.xml><?xml version="1.0" encoding="utf-8"?>
 <p:notes xmlns:a="http://schemas.openxmlformats.org/drawingml/2006/main" xmlns:r="http://schemas.openxmlformats.org/officeDocument/2006/relationships" xmlns:p="http://schemas.openxmlformats.org/presentationml/2006/main">
   <p:cSld>
     <p:spTree>
@@ -1754,7 +1839,7 @@
           <a:p>
             <a:fld id="{AFF60533-1213-4FCB-A4AA-C44494E2E2E7}" type="slidenum">
               <a:rPr lang="en-US" smtClean="0"/>
-              <a:t>18</a:t>
+              <a:t>19</a:t>
             </a:fld>
             <a:endParaRPr lang="en-US"/>
           </a:p>
@@ -1773,7 +1858,7 @@
 </p:notes>
 </file>
 
-<file path=ppt/notesSlides/notesSlide17.xml><?xml version="1.0" encoding="utf-8"?>
+<file path=ppt/notesSlides/notesSlide18.xml><?xml version="1.0" encoding="utf-8"?>
 <p:notes xmlns:a="http://schemas.openxmlformats.org/drawingml/2006/main" xmlns:r="http://schemas.openxmlformats.org/officeDocument/2006/relationships" xmlns:p="http://schemas.openxmlformats.org/presentationml/2006/main">
   <p:cSld>
     <p:spTree>
@@ -1862,7 +1947,7 @@
           <a:p>
             <a:fld id="{AFF60533-1213-4FCB-A4AA-C44494E2E2E7}" type="slidenum">
               <a:rPr lang="en-US" smtClean="0"/>
-              <a:t>19</a:t>
+              <a:t>20</a:t>
             </a:fld>
             <a:endParaRPr lang="en-US"/>
           </a:p>
@@ -1881,7 +1966,7 @@
 </p:notes>
 </file>
 
-<file path=ppt/notesSlides/notesSlide18.xml><?xml version="1.0" encoding="utf-8"?>
+<file path=ppt/notesSlides/notesSlide19.xml><?xml version="1.0" encoding="utf-8"?>
 <p:notes xmlns:a="http://schemas.openxmlformats.org/drawingml/2006/main" xmlns:r="http://schemas.openxmlformats.org/officeDocument/2006/relationships" xmlns:p="http://schemas.openxmlformats.org/presentationml/2006/main">
   <p:cSld>
     <p:spTree>
@@ -1970,7 +2055,7 @@
           <a:p>
             <a:fld id="{AFF60533-1213-4FCB-A4AA-C44494E2E2E7}" type="slidenum">
               <a:rPr lang="en-US" smtClean="0"/>
-              <a:t>20</a:t>
+              <a:t>21</a:t>
             </a:fld>
             <a:endParaRPr lang="en-US"/>
           </a:p>
@@ -1980,114 +2065,6 @@
     <p:extLst>
       <p:ext uri="{BB962C8B-B14F-4D97-AF65-F5344CB8AC3E}">
         <p14:creationId xmlns:p14="http://schemas.microsoft.com/office/powerpoint/2010/main" val="292794308"/>
-      </p:ext>
-    </p:extLst>
-  </p:cSld>
-  <p:clrMapOvr>
-    <a:masterClrMapping/>
-  </p:clrMapOvr>
-</p:notes>
-</file>
-
-<file path=ppt/notesSlides/notesSlide19.xml><?xml version="1.0" encoding="utf-8"?>
-<p:notes xmlns:a="http://schemas.openxmlformats.org/drawingml/2006/main" xmlns:r="http://schemas.openxmlformats.org/officeDocument/2006/relationships" xmlns:p="http://schemas.openxmlformats.org/presentationml/2006/main">
-  <p:cSld>
-    <p:spTree>
-      <p:nvGrpSpPr>
-        <p:cNvPr id="1" name="">
-          <a:extLst>
-            <a:ext uri="{FF2B5EF4-FFF2-40B4-BE49-F238E27FC236}">
-              <a16:creationId xmlns:a16="http://schemas.microsoft.com/office/drawing/2014/main" id="{14F66892-2A76-8537-0106-2F975C6EA6D5}"/>
-            </a:ext>
-          </a:extLst>
-        </p:cNvPr>
-        <p:cNvGrpSpPr/>
-        <p:nvPr/>
-      </p:nvGrpSpPr>
-      <p:grpSpPr>
-        <a:xfrm>
-          <a:off x="0" y="0"/>
-          <a:ext cx="0" cy="0"/>
-          <a:chOff x="0" y="0"/>
-          <a:chExt cx="0" cy="0"/>
-        </a:xfrm>
-      </p:grpSpPr>
-      <p:sp>
-        <p:nvSpPr>
-          <p:cNvPr id="2" name="Slide Image Placeholder 1">
-            <a:extLst>
-              <a:ext uri="{FF2B5EF4-FFF2-40B4-BE49-F238E27FC236}">
-                <a16:creationId xmlns:a16="http://schemas.microsoft.com/office/drawing/2014/main" id="{669CDBCA-A17A-FCC7-8507-24C91181F808}"/>
-              </a:ext>
-            </a:extLst>
-          </p:cNvPr>
-          <p:cNvSpPr>
-            <a:spLocks noGrp="1" noRot="1" noChangeAspect="1"/>
-          </p:cNvSpPr>
-          <p:nvPr>
-            <p:ph type="sldImg"/>
-          </p:nvPr>
-        </p:nvSpPr>
-        <p:spPr/>
-      </p:sp>
-      <p:sp>
-        <p:nvSpPr>
-          <p:cNvPr id="3" name="Notes Placeholder 2">
-            <a:extLst>
-              <a:ext uri="{FF2B5EF4-FFF2-40B4-BE49-F238E27FC236}">
-                <a16:creationId xmlns:a16="http://schemas.microsoft.com/office/drawing/2014/main" id="{38DBD402-2B4A-8125-4940-BE948C42A2C5}"/>
-              </a:ext>
-            </a:extLst>
-          </p:cNvPr>
-          <p:cNvSpPr>
-            <a:spLocks noGrp="1"/>
-          </p:cNvSpPr>
-          <p:nvPr>
-            <p:ph type="body" idx="1"/>
-          </p:nvPr>
-        </p:nvSpPr>
-        <p:spPr/>
-        <p:txBody>
-          <a:bodyPr/>
-          <a:lstStyle/>
-          <a:p>
-            <a:endParaRPr lang="en-US" dirty="0"/>
-          </a:p>
-        </p:txBody>
-      </p:sp>
-      <p:sp>
-        <p:nvSpPr>
-          <p:cNvPr id="4" name="Slide Number Placeholder 3">
-            <a:extLst>
-              <a:ext uri="{FF2B5EF4-FFF2-40B4-BE49-F238E27FC236}">
-                <a16:creationId xmlns:a16="http://schemas.microsoft.com/office/drawing/2014/main" id="{7AF2A79A-5791-6F7F-DE59-C7439288173C}"/>
-              </a:ext>
-            </a:extLst>
-          </p:cNvPr>
-          <p:cNvSpPr>
-            <a:spLocks noGrp="1"/>
-          </p:cNvSpPr>
-          <p:nvPr>
-            <p:ph type="sldNum" sz="quarter" idx="5"/>
-          </p:nvPr>
-        </p:nvSpPr>
-        <p:spPr/>
-        <p:txBody>
-          <a:bodyPr/>
-          <a:lstStyle/>
-          <a:p>
-            <a:fld id="{AFF60533-1213-4FCB-A4AA-C44494E2E2E7}" type="slidenum">
-              <a:rPr lang="en-US" smtClean="0"/>
-              <a:t>21</a:t>
-            </a:fld>
-            <a:endParaRPr lang="en-US"/>
-          </a:p>
-        </p:txBody>
-      </p:sp>
-    </p:spTree>
-    <p:extLst>
-      <p:ext uri="{BB962C8B-B14F-4D97-AF65-F5344CB8AC3E}">
-        <p14:creationId xmlns:p14="http://schemas.microsoft.com/office/powerpoint/2010/main" val="2973600489"/>
       </p:ext>
     </p:extLst>
   </p:cSld>
@@ -2213,6 +2190,114 @@
         <p:cNvPr id="1" name="">
           <a:extLst>
             <a:ext uri="{FF2B5EF4-FFF2-40B4-BE49-F238E27FC236}">
+              <a16:creationId xmlns:a16="http://schemas.microsoft.com/office/drawing/2014/main" id="{14F66892-2A76-8537-0106-2F975C6EA6D5}"/>
+            </a:ext>
+          </a:extLst>
+        </p:cNvPr>
+        <p:cNvGrpSpPr/>
+        <p:nvPr/>
+      </p:nvGrpSpPr>
+      <p:grpSpPr>
+        <a:xfrm>
+          <a:off x="0" y="0"/>
+          <a:ext cx="0" cy="0"/>
+          <a:chOff x="0" y="0"/>
+          <a:chExt cx="0" cy="0"/>
+        </a:xfrm>
+      </p:grpSpPr>
+      <p:sp>
+        <p:nvSpPr>
+          <p:cNvPr id="2" name="Slide Image Placeholder 1">
+            <a:extLst>
+              <a:ext uri="{FF2B5EF4-FFF2-40B4-BE49-F238E27FC236}">
+                <a16:creationId xmlns:a16="http://schemas.microsoft.com/office/drawing/2014/main" id="{669CDBCA-A17A-FCC7-8507-24C91181F808}"/>
+              </a:ext>
+            </a:extLst>
+          </p:cNvPr>
+          <p:cNvSpPr>
+            <a:spLocks noGrp="1" noRot="1" noChangeAspect="1"/>
+          </p:cNvSpPr>
+          <p:nvPr>
+            <p:ph type="sldImg"/>
+          </p:nvPr>
+        </p:nvSpPr>
+        <p:spPr/>
+      </p:sp>
+      <p:sp>
+        <p:nvSpPr>
+          <p:cNvPr id="3" name="Notes Placeholder 2">
+            <a:extLst>
+              <a:ext uri="{FF2B5EF4-FFF2-40B4-BE49-F238E27FC236}">
+                <a16:creationId xmlns:a16="http://schemas.microsoft.com/office/drawing/2014/main" id="{38DBD402-2B4A-8125-4940-BE948C42A2C5}"/>
+              </a:ext>
+            </a:extLst>
+          </p:cNvPr>
+          <p:cNvSpPr>
+            <a:spLocks noGrp="1"/>
+          </p:cNvSpPr>
+          <p:nvPr>
+            <p:ph type="body" idx="1"/>
+          </p:nvPr>
+        </p:nvSpPr>
+        <p:spPr/>
+        <p:txBody>
+          <a:bodyPr/>
+          <a:lstStyle/>
+          <a:p>
+            <a:endParaRPr lang="en-US" dirty="0"/>
+          </a:p>
+        </p:txBody>
+      </p:sp>
+      <p:sp>
+        <p:nvSpPr>
+          <p:cNvPr id="4" name="Slide Number Placeholder 3">
+            <a:extLst>
+              <a:ext uri="{FF2B5EF4-FFF2-40B4-BE49-F238E27FC236}">
+                <a16:creationId xmlns:a16="http://schemas.microsoft.com/office/drawing/2014/main" id="{7AF2A79A-5791-6F7F-DE59-C7439288173C}"/>
+              </a:ext>
+            </a:extLst>
+          </p:cNvPr>
+          <p:cNvSpPr>
+            <a:spLocks noGrp="1"/>
+          </p:cNvSpPr>
+          <p:nvPr>
+            <p:ph type="sldNum" sz="quarter" idx="5"/>
+          </p:nvPr>
+        </p:nvSpPr>
+        <p:spPr/>
+        <p:txBody>
+          <a:bodyPr/>
+          <a:lstStyle/>
+          <a:p>
+            <a:fld id="{AFF60533-1213-4FCB-A4AA-C44494E2E2E7}" type="slidenum">
+              <a:rPr lang="en-US" smtClean="0"/>
+              <a:t>22</a:t>
+            </a:fld>
+            <a:endParaRPr lang="en-US"/>
+          </a:p>
+        </p:txBody>
+      </p:sp>
+    </p:spTree>
+    <p:extLst>
+      <p:ext uri="{BB962C8B-B14F-4D97-AF65-F5344CB8AC3E}">
+        <p14:creationId xmlns:p14="http://schemas.microsoft.com/office/powerpoint/2010/main" val="2973600489"/>
+      </p:ext>
+    </p:extLst>
+  </p:cSld>
+  <p:clrMapOvr>
+    <a:masterClrMapping/>
+  </p:clrMapOvr>
+</p:notes>
+</file>
+
+<file path=ppt/notesSlides/notesSlide21.xml><?xml version="1.0" encoding="utf-8"?>
+<p:notes xmlns:a="http://schemas.openxmlformats.org/drawingml/2006/main" xmlns:r="http://schemas.openxmlformats.org/officeDocument/2006/relationships" xmlns:p="http://schemas.openxmlformats.org/presentationml/2006/main">
+  <p:cSld>
+    <p:spTree>
+      <p:nvGrpSpPr>
+        <p:cNvPr id="1" name="">
+          <a:extLst>
+            <a:ext uri="{FF2B5EF4-FFF2-40B4-BE49-F238E27FC236}">
               <a16:creationId xmlns:a16="http://schemas.microsoft.com/office/drawing/2014/main" id="{E1D8A12A-57E2-218F-FA92-A3C755ED1700}"/>
             </a:ext>
           </a:extLst>
@@ -2294,7 +2379,7 @@
           <a:p>
             <a:fld id="{AFF60533-1213-4FCB-A4AA-C44494E2E2E7}" type="slidenum">
               <a:rPr lang="en-US" smtClean="0"/>
-              <a:t>22</a:t>
+              <a:t>23</a:t>
             </a:fld>
             <a:endParaRPr lang="en-US"/>
           </a:p>
@@ -2321,7 +2406,7 @@
         <p:cNvPr id="1" name="">
           <a:extLst>
             <a:ext uri="{FF2B5EF4-FFF2-40B4-BE49-F238E27FC236}">
-              <a16:creationId xmlns:a16="http://schemas.microsoft.com/office/drawing/2014/main" id="{B0B5D1F8-7A2A-4753-F99A-91DE35F42498}"/>
+              <a16:creationId xmlns:a16="http://schemas.microsoft.com/office/drawing/2014/main" id="{40657C6F-F280-7A17-D18F-EDA91D88D747}"/>
             </a:ext>
           </a:extLst>
         </p:cNvPr>
@@ -2341,7 +2426,7 @@
           <p:cNvPr id="2" name="Slide Image Placeholder 1">
             <a:extLst>
               <a:ext uri="{FF2B5EF4-FFF2-40B4-BE49-F238E27FC236}">
-                <a16:creationId xmlns:a16="http://schemas.microsoft.com/office/drawing/2014/main" id="{5A04B0B1-9350-CC63-1CF2-A40F11E8F471}"/>
+                <a16:creationId xmlns:a16="http://schemas.microsoft.com/office/drawing/2014/main" id="{8E85A04D-D556-C515-86FA-C26506FF4231}"/>
               </a:ext>
             </a:extLst>
           </p:cNvPr>
@@ -2359,7 +2444,7 @@
           <p:cNvPr id="3" name="Notes Placeholder 2">
             <a:extLst>
               <a:ext uri="{FF2B5EF4-FFF2-40B4-BE49-F238E27FC236}">
-                <a16:creationId xmlns:a16="http://schemas.microsoft.com/office/drawing/2014/main" id="{5BCB82AE-5A7D-130E-A1D7-394B4AC58139}"/>
+                <a16:creationId xmlns:a16="http://schemas.microsoft.com/office/drawing/2014/main" id="{12022787-B80D-841B-919A-A819694B3E26}"/>
               </a:ext>
             </a:extLst>
           </p:cNvPr>
@@ -2384,7 +2469,7 @@
           <p:cNvPr id="4" name="Slide Number Placeholder 3">
             <a:extLst>
               <a:ext uri="{FF2B5EF4-FFF2-40B4-BE49-F238E27FC236}">
-                <a16:creationId xmlns:a16="http://schemas.microsoft.com/office/drawing/2014/main" id="{0792B997-0EDB-1DC4-B94F-D35F6A57D099}"/>
+                <a16:creationId xmlns:a16="http://schemas.microsoft.com/office/drawing/2014/main" id="{07C2A21D-EA21-BC5D-C65E-1AD0C9FAE81D}"/>
               </a:ext>
             </a:extLst>
           </p:cNvPr>
@@ -2411,7 +2496,7 @@
     </p:spTree>
     <p:extLst>
       <p:ext uri="{BB962C8B-B14F-4D97-AF65-F5344CB8AC3E}">
-        <p14:creationId xmlns:p14="http://schemas.microsoft.com/office/powerpoint/2010/main" val="4199571660"/>
+        <p14:creationId xmlns:p14="http://schemas.microsoft.com/office/powerpoint/2010/main" val="1233397966"/>
       </p:ext>
     </p:extLst>
   </p:cSld>
@@ -2537,6 +2622,114 @@
         <p:cNvPr id="1" name="">
           <a:extLst>
             <a:ext uri="{FF2B5EF4-FFF2-40B4-BE49-F238E27FC236}">
+              <a16:creationId xmlns:a16="http://schemas.microsoft.com/office/drawing/2014/main" id="{B0B5D1F8-7A2A-4753-F99A-91DE35F42498}"/>
+            </a:ext>
+          </a:extLst>
+        </p:cNvPr>
+        <p:cNvGrpSpPr/>
+        <p:nvPr/>
+      </p:nvGrpSpPr>
+      <p:grpSpPr>
+        <a:xfrm>
+          <a:off x="0" y="0"/>
+          <a:ext cx="0" cy="0"/>
+          <a:chOff x="0" y="0"/>
+          <a:chExt cx="0" cy="0"/>
+        </a:xfrm>
+      </p:grpSpPr>
+      <p:sp>
+        <p:nvSpPr>
+          <p:cNvPr id="2" name="Slide Image Placeholder 1">
+            <a:extLst>
+              <a:ext uri="{FF2B5EF4-FFF2-40B4-BE49-F238E27FC236}">
+                <a16:creationId xmlns:a16="http://schemas.microsoft.com/office/drawing/2014/main" id="{5A04B0B1-9350-CC63-1CF2-A40F11E8F471}"/>
+              </a:ext>
+            </a:extLst>
+          </p:cNvPr>
+          <p:cNvSpPr>
+            <a:spLocks noGrp="1" noRot="1" noChangeAspect="1"/>
+          </p:cNvSpPr>
+          <p:nvPr>
+            <p:ph type="sldImg"/>
+          </p:nvPr>
+        </p:nvSpPr>
+        <p:spPr/>
+      </p:sp>
+      <p:sp>
+        <p:nvSpPr>
+          <p:cNvPr id="3" name="Notes Placeholder 2">
+            <a:extLst>
+              <a:ext uri="{FF2B5EF4-FFF2-40B4-BE49-F238E27FC236}">
+                <a16:creationId xmlns:a16="http://schemas.microsoft.com/office/drawing/2014/main" id="{5BCB82AE-5A7D-130E-A1D7-394B4AC58139}"/>
+              </a:ext>
+            </a:extLst>
+          </p:cNvPr>
+          <p:cNvSpPr>
+            <a:spLocks noGrp="1"/>
+          </p:cNvSpPr>
+          <p:nvPr>
+            <p:ph type="body" idx="1"/>
+          </p:nvPr>
+        </p:nvSpPr>
+        <p:spPr/>
+        <p:txBody>
+          <a:bodyPr/>
+          <a:lstStyle/>
+          <a:p>
+            <a:endParaRPr lang="en-US" dirty="0"/>
+          </a:p>
+        </p:txBody>
+      </p:sp>
+      <p:sp>
+        <p:nvSpPr>
+          <p:cNvPr id="4" name="Slide Number Placeholder 3">
+            <a:extLst>
+              <a:ext uri="{FF2B5EF4-FFF2-40B4-BE49-F238E27FC236}">
+                <a16:creationId xmlns:a16="http://schemas.microsoft.com/office/drawing/2014/main" id="{0792B997-0EDB-1DC4-B94F-D35F6A57D099}"/>
+              </a:ext>
+            </a:extLst>
+          </p:cNvPr>
+          <p:cNvSpPr>
+            <a:spLocks noGrp="1"/>
+          </p:cNvSpPr>
+          <p:nvPr>
+            <p:ph type="sldNum" sz="quarter" idx="5"/>
+          </p:nvPr>
+        </p:nvSpPr>
+        <p:spPr/>
+        <p:txBody>
+          <a:bodyPr/>
+          <a:lstStyle/>
+          <a:p>
+            <a:fld id="{AFF60533-1213-4FCB-A4AA-C44494E2E2E7}" type="slidenum">
+              <a:rPr lang="en-US" smtClean="0"/>
+              <a:t>6</a:t>
+            </a:fld>
+            <a:endParaRPr lang="en-US"/>
+          </a:p>
+        </p:txBody>
+      </p:sp>
+    </p:spTree>
+    <p:extLst>
+      <p:ext uri="{BB962C8B-B14F-4D97-AF65-F5344CB8AC3E}">
+        <p14:creationId xmlns:p14="http://schemas.microsoft.com/office/powerpoint/2010/main" val="4199571660"/>
+      </p:ext>
+    </p:extLst>
+  </p:cSld>
+  <p:clrMapOvr>
+    <a:masterClrMapping/>
+  </p:clrMapOvr>
+</p:notes>
+</file>
+
+<file path=ppt/notesSlides/notesSlide6.xml><?xml version="1.0" encoding="utf-8"?>
+<p:notes xmlns:a="http://schemas.openxmlformats.org/drawingml/2006/main" xmlns:r="http://schemas.openxmlformats.org/officeDocument/2006/relationships" xmlns:p="http://schemas.openxmlformats.org/presentationml/2006/main">
+  <p:cSld>
+    <p:spTree>
+      <p:nvGrpSpPr>
+        <p:cNvPr id="1" name="">
+          <a:extLst>
+            <a:ext uri="{FF2B5EF4-FFF2-40B4-BE49-F238E27FC236}">
               <a16:creationId xmlns:a16="http://schemas.microsoft.com/office/drawing/2014/main" id="{A2CE94EE-5A03-BBC5-6B2C-0B73D5772EAD}"/>
             </a:ext>
           </a:extLst>
@@ -2618,7 +2811,7 @@
           <a:p>
             <a:fld id="{AFF60533-1213-4FCB-A4AA-C44494E2E2E7}" type="slidenum">
               <a:rPr lang="en-US" smtClean="0"/>
-              <a:t>6</a:t>
+              <a:t>7</a:t>
             </a:fld>
             <a:endParaRPr lang="en-US"/>
           </a:p>
@@ -2637,7 +2830,7 @@
 </p:notes>
 </file>
 
-<file path=ppt/notesSlides/notesSlide6.xml><?xml version="1.0" encoding="utf-8"?>
+<file path=ppt/notesSlides/notesSlide7.xml><?xml version="1.0" encoding="utf-8"?>
 <p:notes xmlns:a="http://schemas.openxmlformats.org/drawingml/2006/main" xmlns:r="http://schemas.openxmlformats.org/officeDocument/2006/relationships" xmlns:p="http://schemas.openxmlformats.org/presentationml/2006/main">
   <p:cSld>
     <p:spTree>
@@ -2853,7 +3046,7 @@
           <a:p>
             <a:fld id="{AFF60533-1213-4FCB-A4AA-C44494E2E2E7}" type="slidenum">
               <a:rPr lang="en-US" smtClean="0"/>
-              <a:t>7</a:t>
+              <a:t>8</a:t>
             </a:fld>
             <a:endParaRPr lang="en-US"/>
           </a:p>
@@ -2872,7 +3065,7 @@
 </p:notes>
 </file>
 
-<file path=ppt/notesSlides/notesSlide7.xml><?xml version="1.0" encoding="utf-8"?>
+<file path=ppt/notesSlides/notesSlide8.xml><?xml version="1.0" encoding="utf-8"?>
 <p:notes xmlns:a="http://schemas.openxmlformats.org/drawingml/2006/main" xmlns:r="http://schemas.openxmlformats.org/officeDocument/2006/relationships" xmlns:p="http://schemas.openxmlformats.org/presentationml/2006/main">
   <p:cSld>
     <p:spTree>
@@ -2961,7 +3154,7 @@
           <a:p>
             <a:fld id="{AFF60533-1213-4FCB-A4AA-C44494E2E2E7}" type="slidenum">
               <a:rPr lang="en-US" smtClean="0"/>
-              <a:t>8</a:t>
+              <a:t>9</a:t>
             </a:fld>
             <a:endParaRPr lang="en-US"/>
           </a:p>
@@ -2980,7 +3173,7 @@
 </p:notes>
 </file>
 
-<file path=ppt/notesSlides/notesSlide8.xml><?xml version="1.0" encoding="utf-8"?>
+<file path=ppt/notesSlides/notesSlide9.xml><?xml version="1.0" encoding="utf-8"?>
 <p:notes xmlns:a="http://schemas.openxmlformats.org/drawingml/2006/main" xmlns:r="http://schemas.openxmlformats.org/officeDocument/2006/relationships" xmlns:p="http://schemas.openxmlformats.org/presentationml/2006/main">
   <p:cSld>
     <p:spTree>
@@ -3069,7 +3262,7 @@
           <a:p>
             <a:fld id="{AFF60533-1213-4FCB-A4AA-C44494E2E2E7}" type="slidenum">
               <a:rPr lang="en-US" smtClean="0"/>
-              <a:t>9</a:t>
+              <a:t>10</a:t>
             </a:fld>
             <a:endParaRPr lang="en-US"/>
           </a:p>
@@ -3079,90 +3272,6 @@
     <p:extLst>
       <p:ext uri="{BB962C8B-B14F-4D97-AF65-F5344CB8AC3E}">
         <p14:creationId xmlns:p14="http://schemas.microsoft.com/office/powerpoint/2010/main" val="414462179"/>
-      </p:ext>
-    </p:extLst>
-  </p:cSld>
-  <p:clrMapOvr>
-    <a:masterClrMapping/>
-  </p:clrMapOvr>
-</p:notes>
-</file>
-
-<file path=ppt/notesSlides/notesSlide9.xml><?xml version="1.0" encoding="utf-8"?>
-<p:notes xmlns:a="http://schemas.openxmlformats.org/drawingml/2006/main" xmlns:r="http://schemas.openxmlformats.org/officeDocument/2006/relationships" xmlns:p="http://schemas.openxmlformats.org/presentationml/2006/main">
-  <p:cSld>
-    <p:spTree>
-      <p:nvGrpSpPr>
-        <p:cNvPr id="1" name=""/>
-        <p:cNvGrpSpPr/>
-        <p:nvPr/>
-      </p:nvGrpSpPr>
-      <p:grpSpPr>
-        <a:xfrm>
-          <a:off x="0" y="0"/>
-          <a:ext cx="0" cy="0"/>
-          <a:chOff x="0" y="0"/>
-          <a:chExt cx="0" cy="0"/>
-        </a:xfrm>
-      </p:grpSpPr>
-      <p:sp>
-        <p:nvSpPr>
-          <p:cNvPr id="2" name="Slide Image Placeholder 1"/>
-          <p:cNvSpPr>
-            <a:spLocks noGrp="1" noRot="1" noChangeAspect="1"/>
-          </p:cNvSpPr>
-          <p:nvPr>
-            <p:ph type="sldImg"/>
-          </p:nvPr>
-        </p:nvSpPr>
-        <p:spPr/>
-      </p:sp>
-      <p:sp>
-        <p:nvSpPr>
-          <p:cNvPr id="3" name="Notes Placeholder 2"/>
-          <p:cNvSpPr>
-            <a:spLocks noGrp="1"/>
-          </p:cNvSpPr>
-          <p:nvPr>
-            <p:ph type="body" idx="1"/>
-          </p:nvPr>
-        </p:nvSpPr>
-        <p:spPr/>
-        <p:txBody>
-          <a:bodyPr/>
-          <a:lstStyle/>
-          <a:p>
-            <a:endParaRPr lang="en-US" dirty="0"/>
-          </a:p>
-        </p:txBody>
-      </p:sp>
-      <p:sp>
-        <p:nvSpPr>
-          <p:cNvPr id="4" name="Slide Number Placeholder 3"/>
-          <p:cNvSpPr>
-            <a:spLocks noGrp="1"/>
-          </p:cNvSpPr>
-          <p:nvPr>
-            <p:ph type="sldNum" sz="quarter" idx="5"/>
-          </p:nvPr>
-        </p:nvSpPr>
-        <p:spPr/>
-        <p:txBody>
-          <a:bodyPr/>
-          <a:lstStyle/>
-          <a:p>
-            <a:fld id="{AFF60533-1213-4FCB-A4AA-C44494E2E2E7}" type="slidenum">
-              <a:rPr lang="en-US" smtClean="0"/>
-              <a:t>10</a:t>
-            </a:fld>
-            <a:endParaRPr lang="en-US"/>
-          </a:p>
-        </p:txBody>
-      </p:sp>
-    </p:spTree>
-    <p:extLst>
-      <p:ext uri="{BB962C8B-B14F-4D97-AF65-F5344CB8AC3E}">
-        <p14:creationId xmlns:p14="http://schemas.microsoft.com/office/powerpoint/2010/main" val="1184885258"/>
       </p:ext>
     </p:extLst>
   </p:cSld>
@@ -3433,7 +3542,7 @@
           <a:p>
             <a:fld id="{FAAB834C-2F9F-4134-A8A6-8D28F07BEAB5}" type="datetime1">
               <a:rPr lang="en-US" smtClean="0"/>
-              <a:t>8/21/2025</a:t>
+              <a:t>8/25/2025</a:t>
             </a:fld>
             <a:endParaRPr lang="en-US"/>
           </a:p>
@@ -3582,7 +3691,7 @@
           <a:p>
             <a:fld id="{14EC8B48-3E80-40FE-82B7-08F610C8B0AF}" type="datetime1">
               <a:rPr lang="en-US" smtClean="0"/>
-              <a:t>8/21/2025</a:t>
+              <a:t>8/25/2025</a:t>
             </a:fld>
             <a:endParaRPr lang="en-US"/>
           </a:p>
@@ -3867,7 +3976,7 @@
           <a:p>
             <a:fld id="{F0056A89-B657-4E56-81EA-47AEC42B3D30}" type="datetime1">
               <a:rPr lang="en-US" smtClean="0"/>
-              <a:t>8/21/2025</a:t>
+              <a:t>8/25/2025</a:t>
             </a:fld>
             <a:endParaRPr lang="en-US"/>
           </a:p>
@@ -4149,7 +4258,7 @@
           <a:p>
             <a:fld id="{B5CFD0E2-6DB6-48B0-A00E-AF2C677C1319}" type="datetime1">
               <a:rPr lang="en-US" smtClean="0"/>
-              <a:t>8/21/2025</a:t>
+              <a:t>8/25/2025</a:t>
             </a:fld>
             <a:endParaRPr lang="en-US"/>
           </a:p>
@@ -4427,7 +4536,7 @@
           <a:p>
             <a:fld id="{B3C5E615-12C4-4709-B50C-4AFC9D577141}" type="datetime1">
               <a:rPr lang="en-US" smtClean="0"/>
-              <a:t>8/21/2025</a:t>
+              <a:t>8/25/2025</a:t>
             </a:fld>
             <a:endParaRPr lang="en-US"/>
           </a:p>
@@ -4856,7 +4965,7 @@
           <a:p>
             <a:fld id="{8F516FE9-DAFF-4019-B1DF-FCD5398715BB}" type="datetime1">
               <a:rPr lang="en-US" smtClean="0"/>
-              <a:t>8/21/2025</a:t>
+              <a:t>8/25/2025</a:t>
             </a:fld>
             <a:endParaRPr lang="en-US"/>
           </a:p>
@@ -5017,7 +5126,7 @@
           <a:p>
             <a:fld id="{AFDEACDC-4FA8-4934-9E2F-B8BAA099B586}" type="datetime1">
               <a:rPr lang="en-US" smtClean="0"/>
-              <a:t>8/21/2025</a:t>
+              <a:t>8/25/2025</a:t>
             </a:fld>
             <a:endParaRPr lang="en-US"/>
           </a:p>
@@ -5339,7 +5448,7 @@
           <a:p>
             <a:fld id="{618E9538-4AA9-4306-AAAC-5D9AE10FAA03}" type="datetime1">
               <a:rPr lang="en-US" smtClean="0"/>
-              <a:t>8/21/2025</a:t>
+              <a:t>8/25/2025</a:t>
             </a:fld>
             <a:endParaRPr lang="en-US"/>
           </a:p>
@@ -5627,7 +5736,7 @@
           <a:p>
             <a:fld id="{D822262E-171E-47EC-8BDD-63B9658BD71F}" type="datetime1">
               <a:rPr lang="en-US" smtClean="0"/>
-              <a:t>8/21/2025</a:t>
+              <a:t>8/25/2025</a:t>
             </a:fld>
             <a:endParaRPr lang="en-US"/>
           </a:p>
@@ -5822,7 +5931,7 @@
           <a:p>
             <a:fld id="{9D1DDE8F-1896-42B2-B75E-118659C1A926}" type="datetime1">
               <a:rPr lang="en-US" smtClean="0"/>
-              <a:t>8/21/2025</a:t>
+              <a:t>8/25/2025</a:t>
             </a:fld>
             <a:endParaRPr lang="en-US"/>
           </a:p>
@@ -6701,7 +6810,7 @@
           <a:p>
             <a:fld id="{0ECCE86E-37E5-4543-A6EB-A0C93BD06DFB}" type="datetime1">
               <a:rPr lang="en-US" smtClean="0"/>
-              <a:t>8/21/2025</a:t>
+              <a:t>8/25/2025</a:t>
             </a:fld>
             <a:endParaRPr lang="en-US"/>
           </a:p>
@@ -6818,6 +6927,243 @@
 </file>
 
 <file path=ppt/slides/slide10.xml><?xml version="1.0" encoding="utf-8"?>
+<p:sld xmlns:a="http://schemas.openxmlformats.org/drawingml/2006/main" xmlns:r="http://schemas.openxmlformats.org/officeDocument/2006/relationships" xmlns:p="http://schemas.openxmlformats.org/presentationml/2006/main">
+  <p:cSld>
+    <p:spTree>
+      <p:nvGrpSpPr>
+        <p:cNvPr id="1" name="">
+          <a:extLst>
+            <a:ext uri="{FF2B5EF4-FFF2-40B4-BE49-F238E27FC236}">
+              <a16:creationId xmlns:a16="http://schemas.microsoft.com/office/drawing/2014/main" id="{03092A39-4808-D1C5-1C2D-4C77A0CBAED9}"/>
+            </a:ext>
+          </a:extLst>
+        </p:cNvPr>
+        <p:cNvGrpSpPr/>
+        <p:nvPr/>
+      </p:nvGrpSpPr>
+      <p:grpSpPr>
+        <a:xfrm>
+          <a:off x="0" y="0"/>
+          <a:ext cx="0" cy="0"/>
+          <a:chOff x="0" y="0"/>
+          <a:chExt cx="0" cy="0"/>
+        </a:xfrm>
+      </p:grpSpPr>
+      <p:sp>
+        <p:nvSpPr>
+          <p:cNvPr id="2" name="Content Placeholder 1">
+            <a:extLst>
+              <a:ext uri="{FF2B5EF4-FFF2-40B4-BE49-F238E27FC236}">
+                <a16:creationId xmlns:a16="http://schemas.microsoft.com/office/drawing/2014/main" id="{57E0CA37-DE69-39D8-9201-259F23020AD7}"/>
+              </a:ext>
+            </a:extLst>
+          </p:cNvPr>
+          <p:cNvSpPr>
+            <a:spLocks noGrp="1"/>
+          </p:cNvSpPr>
+          <p:nvPr>
+            <p:ph sz="half" idx="1"/>
+          </p:nvPr>
+        </p:nvSpPr>
+        <p:spPr>
+          <a:xfrm>
+            <a:off x="598503" y="782425"/>
+            <a:ext cx="11017391" cy="5394538"/>
+          </a:xfrm>
+        </p:spPr>
+        <p:txBody>
+          <a:bodyPr>
+            <a:normAutofit/>
+          </a:bodyPr>
+          <a:lstStyle/>
+          <a:p>
+            <a:r>
+              <a:rPr lang="en-US" sz="1600" dirty="0"/>
+              <a:t>The adjusted timeline provides:</a:t>
+            </a:r>
+          </a:p>
+          <a:p>
+            <a:pPr lvl="1"/>
+            <a:r>
+              <a:rPr lang="en-US" sz="1600" dirty="0"/>
+              <a:t>Adequate time for comprehensive development of expanded features</a:t>
+            </a:r>
+          </a:p>
+          <a:p>
+            <a:pPr lvl="1"/>
+            <a:r>
+              <a:rPr lang="en-US" sz="1600" dirty="0"/>
+              <a:t>Proper testing cycles for the enhanced functionality</a:t>
+            </a:r>
+          </a:p>
+          <a:p>
+            <a:pPr lvl="1"/>
+            <a:r>
+              <a:rPr lang="en-US" sz="1600" dirty="0"/>
+              <a:t>Quality assurance for the more complex integrations</a:t>
+            </a:r>
+          </a:p>
+          <a:p>
+            <a:pPr lvl="1"/>
+            <a:r>
+              <a:rPr lang="en-US" sz="1600" dirty="0"/>
+              <a:t>Stakeholder alignment on enhanced deliverables</a:t>
+            </a:r>
+            <a:br>
+              <a:rPr lang="en-US" sz="1600" dirty="0"/>
+            </a:br>
+            <a:endParaRPr lang="en-US" sz="1600" dirty="0"/>
+          </a:p>
+          <a:p>
+            <a:r>
+              <a:rPr lang="en-US" sz="1600" dirty="0"/>
+              <a:t>Scope Evolution Highlights:</a:t>
+            </a:r>
+          </a:p>
+          <a:p>
+            <a:pPr lvl="1"/>
+            <a:r>
+              <a:rPr lang="en-US" sz="1600" dirty="0"/>
+              <a:t>Enhanced Security Features - MFA, audit logging, role-based permissions</a:t>
+            </a:r>
+          </a:p>
+          <a:p>
+            <a:pPr lvl="1"/>
+            <a:r>
+              <a:rPr lang="en-US" sz="1600" dirty="0"/>
+              <a:t>Advanced User Experience - Infinite scrolling, improved filtering, mobile considerations</a:t>
+            </a:r>
+          </a:p>
+          <a:p>
+            <a:pPr lvl="1"/>
+            <a:r>
+              <a:rPr lang="en-US" sz="1600" dirty="0"/>
+              <a:t>Complex Data Management - Sophisticated product ID handling, multi-partner associations</a:t>
+            </a:r>
+          </a:p>
+          <a:p>
+            <a:pPr lvl="1"/>
+            <a:r>
+              <a:rPr lang="en-US" sz="1600" dirty="0"/>
+              <a:t>Extended User Types - External partners, varied client access models</a:t>
+            </a:r>
+          </a:p>
+          <a:p>
+            <a:pPr marL="0" indent="0">
+              <a:buNone/>
+            </a:pPr>
+            <a:endParaRPr lang="en-US" sz="1600" dirty="0"/>
+          </a:p>
+        </p:txBody>
+      </p:sp>
+      <p:sp>
+        <p:nvSpPr>
+          <p:cNvPr id="4" name="Date Placeholder 3">
+            <a:extLst>
+              <a:ext uri="{FF2B5EF4-FFF2-40B4-BE49-F238E27FC236}">
+                <a16:creationId xmlns:a16="http://schemas.microsoft.com/office/drawing/2014/main" id="{24BF6EDC-B6C6-A099-DEC4-82C079A82EB1}"/>
+              </a:ext>
+            </a:extLst>
+          </p:cNvPr>
+          <p:cNvSpPr>
+            <a:spLocks noGrp="1"/>
+          </p:cNvSpPr>
+          <p:nvPr>
+            <p:ph type="dt" sz="half" idx="10"/>
+          </p:nvPr>
+        </p:nvSpPr>
+        <p:spPr/>
+        <p:txBody>
+          <a:bodyPr/>
+          <a:lstStyle/>
+          <a:p>
+            <a:fld id="{F0056A89-B657-4E56-81EA-47AEC42B3D30}" type="datetime1">
+              <a:rPr lang="en-US" smtClean="0"/>
+              <a:t>8/25/2025</a:t>
+            </a:fld>
+            <a:endParaRPr lang="en-US"/>
+          </a:p>
+        </p:txBody>
+      </p:sp>
+      <p:sp>
+        <p:nvSpPr>
+          <p:cNvPr id="5" name="Slide Number Placeholder 4">
+            <a:extLst>
+              <a:ext uri="{FF2B5EF4-FFF2-40B4-BE49-F238E27FC236}">
+                <a16:creationId xmlns:a16="http://schemas.microsoft.com/office/drawing/2014/main" id="{FAC73A54-41C8-CA0E-841B-8085AE9581BC}"/>
+              </a:ext>
+            </a:extLst>
+          </p:cNvPr>
+          <p:cNvSpPr>
+            <a:spLocks noGrp="1"/>
+          </p:cNvSpPr>
+          <p:nvPr>
+            <p:ph type="sldNum" sz="quarter" idx="12"/>
+          </p:nvPr>
+        </p:nvSpPr>
+        <p:spPr/>
+        <p:txBody>
+          <a:bodyPr/>
+          <a:lstStyle/>
+          <a:p>
+            <a:fld id="{330EA680-D336-4FF7-8B7A-9848BB0A1C32}" type="slidenum">
+              <a:rPr lang="en-US" smtClean="0"/>
+              <a:t>10</a:t>
+            </a:fld>
+            <a:endParaRPr lang="en-US"/>
+          </a:p>
+        </p:txBody>
+      </p:sp>
+      <p:sp>
+        <p:nvSpPr>
+          <p:cNvPr id="6" name="Title 5">
+            <a:extLst>
+              <a:ext uri="{FF2B5EF4-FFF2-40B4-BE49-F238E27FC236}">
+                <a16:creationId xmlns:a16="http://schemas.microsoft.com/office/drawing/2014/main" id="{848E7924-905A-2614-D7A5-32A814ADF2C9}"/>
+              </a:ext>
+            </a:extLst>
+          </p:cNvPr>
+          <p:cNvSpPr>
+            <a:spLocks noGrp="1"/>
+          </p:cNvSpPr>
+          <p:nvPr>
+            <p:ph type="title"/>
+          </p:nvPr>
+        </p:nvSpPr>
+        <p:spPr/>
+        <p:txBody>
+          <a:bodyPr/>
+          <a:lstStyle/>
+          <a:p>
+            <a:r>
+              <a:rPr lang="en-US" sz="2800" dirty="0"/>
+              <a:t>October 17</a:t>
+            </a:r>
+            <a:r>
+              <a:rPr lang="en-US" sz="2800" baseline="30000" dirty="0"/>
+              <a:t>th</a:t>
+            </a:r>
+            <a:r>
+              <a:rPr lang="en-US" sz="2800" dirty="0"/>
+              <a:t> Go-live</a:t>
+            </a:r>
+          </a:p>
+        </p:txBody>
+      </p:sp>
+    </p:spTree>
+    <p:extLst>
+      <p:ext uri="{BB962C8B-B14F-4D97-AF65-F5344CB8AC3E}">
+        <p14:creationId xmlns:p14="http://schemas.microsoft.com/office/powerpoint/2010/main" val="3707748751"/>
+      </p:ext>
+    </p:extLst>
+  </p:cSld>
+  <p:clrMapOvr>
+    <a:masterClrMapping/>
+  </p:clrMapOvr>
+</p:sld>
+</file>
+
+<file path=ppt/slides/slide11.xml><?xml version="1.0" encoding="utf-8"?>
 <p:sld xmlns:a="http://schemas.openxmlformats.org/drawingml/2006/main" xmlns:r="http://schemas.openxmlformats.org/officeDocument/2006/relationships" xmlns:p="http://schemas.openxmlformats.org/presentationml/2006/main">
   <p:cSld>
     <p:spTree>
@@ -6952,7 +7298,7 @@
           <a:p>
             <a:fld id="{F0056A89-B657-4E56-81EA-47AEC42B3D30}" type="datetime1">
               <a:rPr lang="en-US" smtClean="0"/>
-              <a:t>8/21/2025</a:t>
+              <a:t>8/25/2025</a:t>
             </a:fld>
             <a:endParaRPr lang="en-US"/>
           </a:p>
@@ -6981,7 +7327,7 @@
           <a:p>
             <a:fld id="{330EA680-D336-4FF7-8B7A-9848BB0A1C32}" type="slidenum">
               <a:rPr lang="en-US" smtClean="0"/>
-              <a:t>10</a:t>
+              <a:t>11</a:t>
             </a:fld>
             <a:endParaRPr lang="en-US"/>
           </a:p>
@@ -7028,7 +7374,7 @@
 </p:sld>
 </file>
 
-<file path=ppt/slides/slide11.xml><?xml version="1.0" encoding="utf-8"?>
+<file path=ppt/slides/slide12.xml><?xml version="1.0" encoding="utf-8"?>
 <p:sld xmlns:a="http://schemas.openxmlformats.org/drawingml/2006/main" xmlns:r="http://schemas.openxmlformats.org/officeDocument/2006/relationships" xmlns:p="http://schemas.openxmlformats.org/presentationml/2006/main">
   <p:cSld>
     <p:spTree>
@@ -7127,7 +7473,7 @@
           <a:p>
             <a:fld id="{F0056A89-B657-4E56-81EA-47AEC42B3D30}" type="datetime1">
               <a:rPr lang="en-US" smtClean="0"/>
-              <a:t>8/21/2025</a:t>
+              <a:t>8/25/2025</a:t>
             </a:fld>
             <a:endParaRPr lang="en-US"/>
           </a:p>
@@ -7156,7 +7502,7 @@
           <a:p>
             <a:fld id="{330EA680-D336-4FF7-8B7A-9848BB0A1C32}" type="slidenum">
               <a:rPr lang="en-US" smtClean="0"/>
-              <a:t>11</a:t>
+              <a:t>12</a:t>
             </a:fld>
             <a:endParaRPr lang="en-US"/>
           </a:p>
@@ -7203,7 +7549,7 @@
 </p:sld>
 </file>
 
-<file path=ppt/slides/slide12.xml><?xml version="1.0" encoding="utf-8"?>
+<file path=ppt/slides/slide13.xml><?xml version="1.0" encoding="utf-8"?>
 <p:sld xmlns:a="http://schemas.openxmlformats.org/drawingml/2006/main" xmlns:r="http://schemas.openxmlformats.org/officeDocument/2006/relationships" xmlns:p="http://schemas.openxmlformats.org/presentationml/2006/main">
   <p:cSld>
     <p:spTree>
@@ -7359,7 +7705,7 @@
           <a:p>
             <a:fld id="{F0056A89-B657-4E56-81EA-47AEC42B3D30}" type="datetime1">
               <a:rPr lang="en-US" smtClean="0"/>
-              <a:t>8/21/2025</a:t>
+              <a:t>8/25/2025</a:t>
             </a:fld>
             <a:endParaRPr lang="en-US"/>
           </a:p>
@@ -7388,7 +7734,7 @@
           <a:p>
             <a:fld id="{330EA680-D336-4FF7-8B7A-9848BB0A1C32}" type="slidenum">
               <a:rPr lang="en-US" smtClean="0"/>
-              <a:t>12</a:t>
+              <a:t>13</a:t>
             </a:fld>
             <a:endParaRPr lang="en-US"/>
           </a:p>
@@ -7435,7 +7781,7 @@
 </p:sld>
 </file>
 
-<file path=ppt/slides/slide13.xml><?xml version="1.0" encoding="utf-8"?>
+<file path=ppt/slides/slide14.xml><?xml version="1.0" encoding="utf-8"?>
 <p:sld xmlns:a="http://schemas.openxmlformats.org/drawingml/2006/main" xmlns:r="http://schemas.openxmlformats.org/officeDocument/2006/relationships" xmlns:p="http://schemas.openxmlformats.org/presentationml/2006/main">
   <p:cSld>
     <p:spTree>
@@ -7531,7 +7877,7 @@
           <a:p>
             <a:fld id="{B3C5E615-12C4-4709-B50C-4AFC9D577141}" type="datetime1">
               <a:rPr lang="en-US" smtClean="0"/>
-              <a:t>8/22/2025</a:t>
+              <a:t>8/25/2025</a:t>
             </a:fld>
             <a:endParaRPr lang="en-US"/>
           </a:p>
@@ -7560,7 +7906,7 @@
           <a:p>
             <a:fld id="{330EA680-D336-4FF7-8B7A-9848BB0A1C32}" type="slidenum">
               <a:rPr lang="en-US" smtClean="0"/>
-              <a:t>13</a:t>
+              <a:t>14</a:t>
             </a:fld>
             <a:endParaRPr lang="en-US"/>
           </a:p>
@@ -7579,7 +7925,7 @@
 </p:sld>
 </file>
 
-<file path=ppt/slides/slide14.xml><?xml version="1.0" encoding="utf-8"?>
+<file path=ppt/slides/slide15.xml><?xml version="1.0" encoding="utf-8"?>
 <p:sld xmlns:a="http://schemas.openxmlformats.org/drawingml/2006/main" xmlns:r="http://schemas.openxmlformats.org/officeDocument/2006/relationships" xmlns:p="http://schemas.openxmlformats.org/presentationml/2006/main">
   <p:cSld>
     <p:spTree>
@@ -7817,7 +8163,7 @@
           <a:p>
             <a:fld id="{F0056A89-B657-4E56-81EA-47AEC42B3D30}" type="datetime1">
               <a:rPr lang="en-US" smtClean="0"/>
-              <a:t>8/22/2025</a:t>
+              <a:t>8/25/2025</a:t>
             </a:fld>
             <a:endParaRPr lang="en-US"/>
           </a:p>
@@ -7846,7 +8192,7 @@
           <a:p>
             <a:fld id="{330EA680-D336-4FF7-8B7A-9848BB0A1C32}" type="slidenum">
               <a:rPr lang="en-US" smtClean="0"/>
-              <a:t>14</a:t>
+              <a:t>15</a:t>
             </a:fld>
             <a:endParaRPr lang="en-US"/>
           </a:p>
@@ -7893,7 +8239,7 @@
 </p:sld>
 </file>
 
-<file path=ppt/slides/slide15.xml><?xml version="1.0" encoding="utf-8"?>
+<file path=ppt/slides/slide16.xml><?xml version="1.0" encoding="utf-8"?>
 <p:sld xmlns:a="http://schemas.openxmlformats.org/drawingml/2006/main" xmlns:r="http://schemas.openxmlformats.org/officeDocument/2006/relationships" xmlns:p="http://schemas.openxmlformats.org/presentationml/2006/main">
   <p:cSld>
     <p:spTree>
@@ -7980,7 +8326,7 @@
           <a:p>
             <a:fld id="{F0056A89-B657-4E56-81EA-47AEC42B3D30}" type="datetime1">
               <a:rPr lang="en-US" smtClean="0"/>
-              <a:t>8/22/2025</a:t>
+              <a:t>8/25/2025</a:t>
             </a:fld>
             <a:endParaRPr lang="en-US"/>
           </a:p>
@@ -8009,7 +8355,7 @@
           <a:p>
             <a:fld id="{330EA680-D336-4FF7-8B7A-9848BB0A1C32}" type="slidenum">
               <a:rPr lang="en-US" smtClean="0"/>
-              <a:t>15</a:t>
+              <a:t>16</a:t>
             </a:fld>
             <a:endParaRPr lang="en-US"/>
           </a:p>
@@ -8056,7 +8402,7 @@
 </p:sld>
 </file>
 
-<file path=ppt/slides/slide16.xml><?xml version="1.0" encoding="utf-8"?>
+<file path=ppt/slides/slide17.xml><?xml version="1.0" encoding="utf-8"?>
 <p:sld xmlns:a="http://schemas.openxmlformats.org/drawingml/2006/main" xmlns:r="http://schemas.openxmlformats.org/officeDocument/2006/relationships" xmlns:p="http://schemas.openxmlformats.org/presentationml/2006/main">
   <p:cSld>
     <p:spTree>
@@ -8143,7 +8489,7 @@
           <a:p>
             <a:fld id="{F0056A89-B657-4E56-81EA-47AEC42B3D30}" type="datetime1">
               <a:rPr lang="en-US" smtClean="0"/>
-              <a:t>8/22/2025</a:t>
+              <a:t>8/25/2025</a:t>
             </a:fld>
             <a:endParaRPr lang="en-US"/>
           </a:p>
@@ -8172,7 +8518,7 @@
           <a:p>
             <a:fld id="{330EA680-D336-4FF7-8B7A-9848BB0A1C32}" type="slidenum">
               <a:rPr lang="en-US" smtClean="0"/>
-              <a:t>16</a:t>
+              <a:t>17</a:t>
             </a:fld>
             <a:endParaRPr lang="en-US"/>
           </a:p>
@@ -8219,7 +8565,7 @@
 </p:sld>
 </file>
 
-<file path=ppt/slides/slide17.xml><?xml version="1.0" encoding="utf-8"?>
+<file path=ppt/slides/slide18.xml><?xml version="1.0" encoding="utf-8"?>
 <p:sld xmlns:a="http://schemas.openxmlformats.org/drawingml/2006/main" xmlns:r="http://schemas.openxmlformats.org/officeDocument/2006/relationships" xmlns:p="http://schemas.openxmlformats.org/presentationml/2006/main">
   <p:cSld>
     <p:spTree>
@@ -8306,7 +8652,7 @@
           <a:p>
             <a:fld id="{F0056A89-B657-4E56-81EA-47AEC42B3D30}" type="datetime1">
               <a:rPr lang="en-US" smtClean="0"/>
-              <a:t>8/22/2025</a:t>
+              <a:t>8/25/2025</a:t>
             </a:fld>
             <a:endParaRPr lang="en-US"/>
           </a:p>
@@ -8335,7 +8681,7 @@
           <a:p>
             <a:fld id="{330EA680-D336-4FF7-8B7A-9848BB0A1C32}" type="slidenum">
               <a:rPr lang="en-US" smtClean="0"/>
-              <a:t>17</a:t>
+              <a:t>18</a:t>
             </a:fld>
             <a:endParaRPr lang="en-US"/>
           </a:p>
@@ -8382,7 +8728,7 @@
 </p:sld>
 </file>
 
-<file path=ppt/slides/slide18.xml><?xml version="1.0" encoding="utf-8"?>
+<file path=ppt/slides/slide19.xml><?xml version="1.0" encoding="utf-8"?>
 <p:sld xmlns:a="http://schemas.openxmlformats.org/drawingml/2006/main" xmlns:r="http://schemas.openxmlformats.org/officeDocument/2006/relationships" xmlns:p="http://schemas.openxmlformats.org/presentationml/2006/main">
   <p:cSld>
     <p:spTree>
@@ -8469,7 +8815,7 @@
           <a:p>
             <a:fld id="{F0056A89-B657-4E56-81EA-47AEC42B3D30}" type="datetime1">
               <a:rPr lang="en-US" smtClean="0"/>
-              <a:t>8/22/2025</a:t>
+              <a:t>8/25/2025</a:t>
             </a:fld>
             <a:endParaRPr lang="en-US"/>
           </a:p>
@@ -8498,7 +8844,7 @@
           <a:p>
             <a:fld id="{330EA680-D336-4FF7-8B7A-9848BB0A1C32}" type="slidenum">
               <a:rPr lang="en-US" smtClean="0"/>
-              <a:t>18</a:t>
+              <a:t>19</a:t>
             </a:fld>
             <a:endParaRPr lang="en-US"/>
           </a:p>
@@ -8536,169 +8882,6 @@
     <p:extLst>
       <p:ext uri="{BB962C8B-B14F-4D97-AF65-F5344CB8AC3E}">
         <p14:creationId xmlns:p14="http://schemas.microsoft.com/office/powerpoint/2010/main" val="1679103308"/>
-      </p:ext>
-    </p:extLst>
-  </p:cSld>
-  <p:clrMapOvr>
-    <a:masterClrMapping/>
-  </p:clrMapOvr>
-</p:sld>
-</file>
-
-<file path=ppt/slides/slide19.xml><?xml version="1.0" encoding="utf-8"?>
-<p:sld xmlns:a="http://schemas.openxmlformats.org/drawingml/2006/main" xmlns:r="http://schemas.openxmlformats.org/officeDocument/2006/relationships" xmlns:p="http://schemas.openxmlformats.org/presentationml/2006/main">
-  <p:cSld>
-    <p:spTree>
-      <p:nvGrpSpPr>
-        <p:cNvPr id="1" name="">
-          <a:extLst>
-            <a:ext uri="{FF2B5EF4-FFF2-40B4-BE49-F238E27FC236}">
-              <a16:creationId xmlns:a16="http://schemas.microsoft.com/office/drawing/2014/main" id="{2D503685-955C-671D-EDC0-7CFC3C4BD459}"/>
-            </a:ext>
-          </a:extLst>
-        </p:cNvPr>
-        <p:cNvGrpSpPr/>
-        <p:nvPr/>
-      </p:nvGrpSpPr>
-      <p:grpSpPr>
-        <a:xfrm>
-          <a:off x="0" y="0"/>
-          <a:ext cx="0" cy="0"/>
-          <a:chOff x="0" y="0"/>
-          <a:chExt cx="0" cy="0"/>
-        </a:xfrm>
-      </p:grpSpPr>
-      <p:sp>
-        <p:nvSpPr>
-          <p:cNvPr id="2" name="Content Placeholder 1">
-            <a:extLst>
-              <a:ext uri="{FF2B5EF4-FFF2-40B4-BE49-F238E27FC236}">
-                <a16:creationId xmlns:a16="http://schemas.microsoft.com/office/drawing/2014/main" id="{DD531C97-5347-8F63-ACDA-C95A1E4440D4}"/>
-              </a:ext>
-            </a:extLst>
-          </p:cNvPr>
-          <p:cNvSpPr>
-            <a:spLocks noGrp="1"/>
-          </p:cNvSpPr>
-          <p:nvPr>
-            <p:ph sz="half" idx="1"/>
-          </p:nvPr>
-        </p:nvSpPr>
-        <p:spPr>
-          <a:xfrm>
-            <a:off x="598503" y="782425"/>
-            <a:ext cx="11017391" cy="5394538"/>
-          </a:xfrm>
-        </p:spPr>
-        <p:txBody>
-          <a:bodyPr>
-            <a:normAutofit/>
-          </a:bodyPr>
-          <a:lstStyle/>
-          <a:p>
-            <a:r>
-              <a:rPr lang="en-US" sz="1600" dirty="0"/>
-              <a:t>a</a:t>
-            </a:r>
-          </a:p>
-          <a:p>
-            <a:endParaRPr lang="en-US" sz="1600" dirty="0"/>
-          </a:p>
-          <a:p>
-            <a:endParaRPr lang="en-US" sz="1600" dirty="0"/>
-          </a:p>
-        </p:txBody>
-      </p:sp>
-      <p:sp>
-        <p:nvSpPr>
-          <p:cNvPr id="4" name="Date Placeholder 3">
-            <a:extLst>
-              <a:ext uri="{FF2B5EF4-FFF2-40B4-BE49-F238E27FC236}">
-                <a16:creationId xmlns:a16="http://schemas.microsoft.com/office/drawing/2014/main" id="{D3369D43-768E-0A73-E13A-6F67C663B568}"/>
-              </a:ext>
-            </a:extLst>
-          </p:cNvPr>
-          <p:cNvSpPr>
-            <a:spLocks noGrp="1"/>
-          </p:cNvSpPr>
-          <p:nvPr>
-            <p:ph type="dt" sz="half" idx="10"/>
-          </p:nvPr>
-        </p:nvSpPr>
-        <p:spPr/>
-        <p:txBody>
-          <a:bodyPr/>
-          <a:lstStyle/>
-          <a:p>
-            <a:fld id="{F0056A89-B657-4E56-81EA-47AEC42B3D30}" type="datetime1">
-              <a:rPr lang="en-US" smtClean="0"/>
-              <a:t>8/22/2025</a:t>
-            </a:fld>
-            <a:endParaRPr lang="en-US"/>
-          </a:p>
-        </p:txBody>
-      </p:sp>
-      <p:sp>
-        <p:nvSpPr>
-          <p:cNvPr id="5" name="Slide Number Placeholder 4">
-            <a:extLst>
-              <a:ext uri="{FF2B5EF4-FFF2-40B4-BE49-F238E27FC236}">
-                <a16:creationId xmlns:a16="http://schemas.microsoft.com/office/drawing/2014/main" id="{50A7E66E-F072-A876-9DAF-4BB96E64B704}"/>
-              </a:ext>
-            </a:extLst>
-          </p:cNvPr>
-          <p:cNvSpPr>
-            <a:spLocks noGrp="1"/>
-          </p:cNvSpPr>
-          <p:nvPr>
-            <p:ph type="sldNum" sz="quarter" idx="12"/>
-          </p:nvPr>
-        </p:nvSpPr>
-        <p:spPr/>
-        <p:txBody>
-          <a:bodyPr/>
-          <a:lstStyle/>
-          <a:p>
-            <a:fld id="{330EA680-D336-4FF7-8B7A-9848BB0A1C32}" type="slidenum">
-              <a:rPr lang="en-US" smtClean="0"/>
-              <a:t>19</a:t>
-            </a:fld>
-            <a:endParaRPr lang="en-US"/>
-          </a:p>
-        </p:txBody>
-      </p:sp>
-      <p:sp>
-        <p:nvSpPr>
-          <p:cNvPr id="6" name="Title 5">
-            <a:extLst>
-              <a:ext uri="{FF2B5EF4-FFF2-40B4-BE49-F238E27FC236}">
-                <a16:creationId xmlns:a16="http://schemas.microsoft.com/office/drawing/2014/main" id="{9D44FC4F-11B1-CAEE-F993-2025857A54DE}"/>
-              </a:ext>
-            </a:extLst>
-          </p:cNvPr>
-          <p:cNvSpPr>
-            <a:spLocks noGrp="1"/>
-          </p:cNvSpPr>
-          <p:nvPr>
-            <p:ph type="title"/>
-          </p:nvPr>
-        </p:nvSpPr>
-        <p:spPr/>
-        <p:txBody>
-          <a:bodyPr/>
-          <a:lstStyle/>
-          <a:p>
-            <a:r>
-              <a:rPr lang="en-US" sz="2800" dirty="0"/>
-              <a:t>A</a:t>
-            </a:r>
-          </a:p>
-        </p:txBody>
-      </p:sp>
-    </p:spTree>
-    <p:extLst>
-      <p:ext uri="{BB962C8B-B14F-4D97-AF65-F5344CB8AC3E}">
-        <p14:creationId xmlns:p14="http://schemas.microsoft.com/office/powerpoint/2010/main" val="2477377988"/>
       </p:ext>
     </p:extLst>
   </p:cSld>
@@ -8806,7 +8989,7 @@
                   <a:spcPts val="600"/>
                 </a:spcAft>
               </a:pPr>
-              <a:t>8/21/2025</a:t>
+              <a:t>8/25/2025</a:t>
             </a:fld>
             <a:endParaRPr lang="en-US" dirty="0"/>
           </a:p>
@@ -21326,6 +21509,169 @@
         <p:cNvPr id="1" name="">
           <a:extLst>
             <a:ext uri="{FF2B5EF4-FFF2-40B4-BE49-F238E27FC236}">
+              <a16:creationId xmlns:a16="http://schemas.microsoft.com/office/drawing/2014/main" id="{2D503685-955C-671D-EDC0-7CFC3C4BD459}"/>
+            </a:ext>
+          </a:extLst>
+        </p:cNvPr>
+        <p:cNvGrpSpPr/>
+        <p:nvPr/>
+      </p:nvGrpSpPr>
+      <p:grpSpPr>
+        <a:xfrm>
+          <a:off x="0" y="0"/>
+          <a:ext cx="0" cy="0"/>
+          <a:chOff x="0" y="0"/>
+          <a:chExt cx="0" cy="0"/>
+        </a:xfrm>
+      </p:grpSpPr>
+      <p:sp>
+        <p:nvSpPr>
+          <p:cNvPr id="2" name="Content Placeholder 1">
+            <a:extLst>
+              <a:ext uri="{FF2B5EF4-FFF2-40B4-BE49-F238E27FC236}">
+                <a16:creationId xmlns:a16="http://schemas.microsoft.com/office/drawing/2014/main" id="{DD531C97-5347-8F63-ACDA-C95A1E4440D4}"/>
+              </a:ext>
+            </a:extLst>
+          </p:cNvPr>
+          <p:cNvSpPr>
+            <a:spLocks noGrp="1"/>
+          </p:cNvSpPr>
+          <p:nvPr>
+            <p:ph sz="half" idx="1"/>
+          </p:nvPr>
+        </p:nvSpPr>
+        <p:spPr>
+          <a:xfrm>
+            <a:off x="598503" y="782425"/>
+            <a:ext cx="11017391" cy="5394538"/>
+          </a:xfrm>
+        </p:spPr>
+        <p:txBody>
+          <a:bodyPr>
+            <a:normAutofit/>
+          </a:bodyPr>
+          <a:lstStyle/>
+          <a:p>
+            <a:r>
+              <a:rPr lang="en-US" sz="1600" dirty="0"/>
+              <a:t>a</a:t>
+            </a:r>
+          </a:p>
+          <a:p>
+            <a:endParaRPr lang="en-US" sz="1600" dirty="0"/>
+          </a:p>
+          <a:p>
+            <a:endParaRPr lang="en-US" sz="1600" dirty="0"/>
+          </a:p>
+        </p:txBody>
+      </p:sp>
+      <p:sp>
+        <p:nvSpPr>
+          <p:cNvPr id="4" name="Date Placeholder 3">
+            <a:extLst>
+              <a:ext uri="{FF2B5EF4-FFF2-40B4-BE49-F238E27FC236}">
+                <a16:creationId xmlns:a16="http://schemas.microsoft.com/office/drawing/2014/main" id="{D3369D43-768E-0A73-E13A-6F67C663B568}"/>
+              </a:ext>
+            </a:extLst>
+          </p:cNvPr>
+          <p:cNvSpPr>
+            <a:spLocks noGrp="1"/>
+          </p:cNvSpPr>
+          <p:nvPr>
+            <p:ph type="dt" sz="half" idx="10"/>
+          </p:nvPr>
+        </p:nvSpPr>
+        <p:spPr/>
+        <p:txBody>
+          <a:bodyPr/>
+          <a:lstStyle/>
+          <a:p>
+            <a:fld id="{F0056A89-B657-4E56-81EA-47AEC42B3D30}" type="datetime1">
+              <a:rPr lang="en-US" smtClean="0"/>
+              <a:t>8/25/2025</a:t>
+            </a:fld>
+            <a:endParaRPr lang="en-US"/>
+          </a:p>
+        </p:txBody>
+      </p:sp>
+      <p:sp>
+        <p:nvSpPr>
+          <p:cNvPr id="5" name="Slide Number Placeholder 4">
+            <a:extLst>
+              <a:ext uri="{FF2B5EF4-FFF2-40B4-BE49-F238E27FC236}">
+                <a16:creationId xmlns:a16="http://schemas.microsoft.com/office/drawing/2014/main" id="{50A7E66E-F072-A876-9DAF-4BB96E64B704}"/>
+              </a:ext>
+            </a:extLst>
+          </p:cNvPr>
+          <p:cNvSpPr>
+            <a:spLocks noGrp="1"/>
+          </p:cNvSpPr>
+          <p:nvPr>
+            <p:ph type="sldNum" sz="quarter" idx="12"/>
+          </p:nvPr>
+        </p:nvSpPr>
+        <p:spPr/>
+        <p:txBody>
+          <a:bodyPr/>
+          <a:lstStyle/>
+          <a:p>
+            <a:fld id="{330EA680-D336-4FF7-8B7A-9848BB0A1C32}" type="slidenum">
+              <a:rPr lang="en-US" smtClean="0"/>
+              <a:t>20</a:t>
+            </a:fld>
+            <a:endParaRPr lang="en-US"/>
+          </a:p>
+        </p:txBody>
+      </p:sp>
+      <p:sp>
+        <p:nvSpPr>
+          <p:cNvPr id="6" name="Title 5">
+            <a:extLst>
+              <a:ext uri="{FF2B5EF4-FFF2-40B4-BE49-F238E27FC236}">
+                <a16:creationId xmlns:a16="http://schemas.microsoft.com/office/drawing/2014/main" id="{9D44FC4F-11B1-CAEE-F993-2025857A54DE}"/>
+              </a:ext>
+            </a:extLst>
+          </p:cNvPr>
+          <p:cNvSpPr>
+            <a:spLocks noGrp="1"/>
+          </p:cNvSpPr>
+          <p:nvPr>
+            <p:ph type="title"/>
+          </p:nvPr>
+        </p:nvSpPr>
+        <p:spPr/>
+        <p:txBody>
+          <a:bodyPr/>
+          <a:lstStyle/>
+          <a:p>
+            <a:r>
+              <a:rPr lang="en-US" sz="2800" dirty="0"/>
+              <a:t>A</a:t>
+            </a:r>
+          </a:p>
+        </p:txBody>
+      </p:sp>
+    </p:spTree>
+    <p:extLst>
+      <p:ext uri="{BB962C8B-B14F-4D97-AF65-F5344CB8AC3E}">
+        <p14:creationId xmlns:p14="http://schemas.microsoft.com/office/powerpoint/2010/main" val="2477377988"/>
+      </p:ext>
+    </p:extLst>
+  </p:cSld>
+  <p:clrMapOvr>
+    <a:masterClrMapping/>
+  </p:clrMapOvr>
+</p:sld>
+</file>
+
+<file path=ppt/slides/slide21.xml><?xml version="1.0" encoding="utf-8"?>
+<p:sld xmlns:a="http://schemas.openxmlformats.org/drawingml/2006/main" xmlns:r="http://schemas.openxmlformats.org/officeDocument/2006/relationships" xmlns:p="http://schemas.openxmlformats.org/presentationml/2006/main">
+  <p:cSld>
+    <p:spTree>
+      <p:nvGrpSpPr>
+        <p:cNvPr id="1" name="">
+          <a:extLst>
+            <a:ext uri="{FF2B5EF4-FFF2-40B4-BE49-F238E27FC236}">
               <a16:creationId xmlns:a16="http://schemas.microsoft.com/office/drawing/2014/main" id="{D646A573-E112-13BA-892C-972A2C2B22ED}"/>
             </a:ext>
           </a:extLst>
@@ -21405,7 +21751,7 @@
           <a:p>
             <a:fld id="{F0056A89-B657-4E56-81EA-47AEC42B3D30}" type="datetime1">
               <a:rPr lang="en-US" smtClean="0"/>
-              <a:t>8/22/2025</a:t>
+              <a:t>8/25/2025</a:t>
             </a:fld>
             <a:endParaRPr lang="en-US"/>
           </a:p>
@@ -21434,7 +21780,7 @@
           <a:p>
             <a:fld id="{330EA680-D336-4FF7-8B7A-9848BB0A1C32}" type="slidenum">
               <a:rPr lang="en-US" smtClean="0"/>
-              <a:t>20</a:t>
+              <a:t>21</a:t>
             </a:fld>
             <a:endParaRPr lang="en-US"/>
           </a:p>
@@ -21481,7 +21827,7 @@
 </p:sld>
 </file>
 
-<file path=ppt/slides/slide21.xml><?xml version="1.0" encoding="utf-8"?>
+<file path=ppt/slides/slide22.xml><?xml version="1.0" encoding="utf-8"?>
 <p:sld xmlns:a="http://schemas.openxmlformats.org/drawingml/2006/main" xmlns:r="http://schemas.openxmlformats.org/officeDocument/2006/relationships" xmlns:p="http://schemas.openxmlformats.org/presentationml/2006/main">
   <p:cSld>
     <p:spTree>
@@ -21568,7 +21914,7 @@
           <a:p>
             <a:fld id="{F0056A89-B657-4E56-81EA-47AEC42B3D30}" type="datetime1">
               <a:rPr lang="en-US" smtClean="0"/>
-              <a:t>8/22/2025</a:t>
+              <a:t>8/25/2025</a:t>
             </a:fld>
             <a:endParaRPr lang="en-US"/>
           </a:p>
@@ -21597,7 +21943,7 @@
           <a:p>
             <a:fld id="{330EA680-D336-4FF7-8B7A-9848BB0A1C32}" type="slidenum">
               <a:rPr lang="en-US" smtClean="0"/>
-              <a:t>21</a:t>
+              <a:t>22</a:t>
             </a:fld>
             <a:endParaRPr lang="en-US"/>
           </a:p>
@@ -21644,7 +21990,7 @@
 </p:sld>
 </file>
 
-<file path=ppt/slides/slide22.xml><?xml version="1.0" encoding="utf-8"?>
+<file path=ppt/slides/slide23.xml><?xml version="1.0" encoding="utf-8"?>
 <p:sld xmlns:a="http://schemas.openxmlformats.org/drawingml/2006/main" xmlns:r="http://schemas.openxmlformats.org/officeDocument/2006/relationships" xmlns:p="http://schemas.openxmlformats.org/presentationml/2006/main">
   <p:cSld>
     <p:spTree>
@@ -21731,7 +22077,7 @@
           <a:p>
             <a:fld id="{F0056A89-B657-4E56-81EA-47AEC42B3D30}" type="datetime1">
               <a:rPr lang="en-US" smtClean="0"/>
-              <a:t>8/22/2025</a:t>
+              <a:t>8/25/2025</a:t>
             </a:fld>
             <a:endParaRPr lang="en-US"/>
           </a:p>
@@ -21760,7 +22106,7 @@
           <a:p>
             <a:fld id="{330EA680-D336-4FF7-8B7A-9848BB0A1C32}" type="slidenum">
               <a:rPr lang="en-US" smtClean="0"/>
-              <a:t>22</a:t>
+              <a:t>23</a:t>
             </a:fld>
             <a:endParaRPr lang="en-US"/>
           </a:p>
@@ -21919,7 +22265,7 @@
           <a:p>
             <a:fld id="{F0056A89-B657-4E56-81EA-47AEC42B3D30}" type="datetime1">
               <a:rPr lang="en-US" smtClean="0"/>
-              <a:t>8/22/2025</a:t>
+              <a:t>8/25/2025</a:t>
             </a:fld>
             <a:endParaRPr lang="en-US"/>
           </a:p>
@@ -22003,7 +22349,7 @@
         <p:cNvPr id="1" name="">
           <a:extLst>
             <a:ext uri="{FF2B5EF4-FFF2-40B4-BE49-F238E27FC236}">
-              <a16:creationId xmlns:a16="http://schemas.microsoft.com/office/drawing/2014/main" id="{43B94313-19C3-7CAB-4AAF-F80F30DFBEE4}"/>
+              <a16:creationId xmlns:a16="http://schemas.microsoft.com/office/drawing/2014/main" id="{7E8098B1-5BB5-5F1F-E11F-7272FDA926CA}"/>
             </a:ext>
           </a:extLst>
         </p:cNvPr>
@@ -22023,7 +22369,7 @@
           <p:cNvPr id="2" name="Content Placeholder 1">
             <a:extLst>
               <a:ext uri="{FF2B5EF4-FFF2-40B4-BE49-F238E27FC236}">
-                <a16:creationId xmlns:a16="http://schemas.microsoft.com/office/drawing/2014/main" id="{554C6B74-1C65-FFA8-999F-F4BFEB75A80A}"/>
+                <a16:creationId xmlns:a16="http://schemas.microsoft.com/office/drawing/2014/main" id="{C06CF711-0026-BFCF-0DF0-5391626D3A20}"/>
               </a:ext>
             </a:extLst>
           </p:cNvPr>
@@ -22042,150 +22388,44 @@
         </p:spPr>
         <p:txBody>
           <a:bodyPr>
-            <a:normAutofit fontScale="55000" lnSpcReduction="20000"/>
+            <a:normAutofit/>
           </a:bodyPr>
           <a:lstStyle/>
           <a:p>
             <a:r>
               <a:rPr lang="en-US" sz="1600" dirty="0"/>
-              <a:t>Architecture </a:t>
+              <a:t>Configure production environment</a:t>
             </a:r>
           </a:p>
           <a:p>
             <a:r>
               <a:rPr lang="en-US" sz="1600" dirty="0"/>
-              <a:t>SAD</a:t>
+              <a:t>SSL certs + domain setup</a:t>
             </a:r>
           </a:p>
           <a:p>
             <a:r>
               <a:rPr lang="en-US" sz="1600" dirty="0"/>
-              <a:t>User Flows</a:t>
+              <a:t>Load balancer + scaling configuration</a:t>
             </a:r>
           </a:p>
           <a:p>
             <a:r>
               <a:rPr lang="en-US" sz="1600" dirty="0"/>
-              <a:t>API Data Flow</a:t>
+              <a:t>Final UAT &amp; bug fixes</a:t>
             </a:r>
           </a:p>
           <a:p>
             <a:r>
               <a:rPr lang="en-US" sz="1600" dirty="0"/>
-              <a:t>ERD Core Entities</a:t>
+              <a:t>Performance testing under load</a:t>
             </a:r>
           </a:p>
           <a:p>
             <a:r>
               <a:rPr lang="en-US" sz="1600" dirty="0"/>
-              <a:t>Security Flow</a:t>
+              <a:t>Final documentation + training deliverables</a:t>
             </a:r>
-          </a:p>
-          <a:p>
-            <a:r>
-              <a:rPr lang="en-US" sz="1600" dirty="0"/>
-              <a:t>Integration Diagram</a:t>
-            </a:r>
-          </a:p>
-          <a:p>
-            <a:r>
-              <a:rPr lang="en-US" sz="1600" dirty="0"/>
-              <a:t>Database Schema</a:t>
-            </a:r>
-          </a:p>
-          <a:p>
-            <a:endParaRPr lang="en-US" sz="1600" dirty="0"/>
-          </a:p>
-          <a:p>
-            <a:endParaRPr lang="en-US" sz="1600" dirty="0"/>
-          </a:p>
-          <a:p>
-            <a:endParaRPr lang="en-US" sz="1600" dirty="0"/>
-          </a:p>
-          <a:p>
-            <a:endParaRPr lang="en-US" sz="1600" dirty="0"/>
-          </a:p>
-          <a:p>
-            <a:endParaRPr lang="en-US" sz="1600" dirty="0"/>
-          </a:p>
-          <a:p>
-            <a:endParaRPr lang="en-US" sz="1600" dirty="0"/>
-          </a:p>
-          <a:p>
-            <a:endParaRPr lang="en-US" sz="1600" dirty="0"/>
-          </a:p>
-          <a:p>
-            <a:endParaRPr lang="en-US" sz="1600" dirty="0"/>
-          </a:p>
-          <a:p>
-            <a:r>
-              <a:rPr lang="en-US" sz="1600" dirty="0"/>
-              <a:t>Comprehensive Test Scenarios Analysis.md</a:t>
-            </a:r>
-          </a:p>
-          <a:p>
-            <a:r>
-              <a:rPr lang="en-US" sz="1600" dirty="0"/>
-              <a:t>Test Execution Results Analysis</a:t>
-            </a:r>
-          </a:p>
-          <a:p>
-            <a:r>
-              <a:rPr lang="en-US" sz="1200" dirty="0"/>
-              <a:t>Deployment and Data Migration Plan</a:t>
-            </a:r>
-          </a:p>
-          <a:p>
-            <a:endParaRPr lang="en-US" sz="1200" dirty="0"/>
-          </a:p>
-          <a:p>
-            <a:r>
-              <a:rPr lang="en-US" sz="1200" dirty="0">
-                <a:solidFill>
-                  <a:srgbClr val="FF0000"/>
-                </a:solidFill>
-              </a:rPr>
-              <a:t>2FA Setup Guide</a:t>
-            </a:r>
-          </a:p>
-          <a:p>
-            <a:r>
-              <a:rPr lang="en-US" sz="1200" dirty="0">
-                <a:solidFill>
-                  <a:srgbClr val="FF0000"/>
-                </a:solidFill>
-              </a:rPr>
-              <a:t>Docker deployment guide</a:t>
-            </a:r>
-          </a:p>
-          <a:p>
-            <a:r>
-              <a:rPr lang="en-US" sz="1200" dirty="0">
-                <a:solidFill>
-                  <a:srgbClr val="FF0000"/>
-                </a:solidFill>
-              </a:rPr>
-              <a:t>Plesk deployment guide</a:t>
-            </a:r>
-          </a:p>
-          <a:p>
-            <a:r>
-              <a:rPr lang="en-US" sz="1200" dirty="0">
-                <a:solidFill>
-                  <a:srgbClr val="FF0000"/>
-                </a:solidFill>
-              </a:rPr>
-              <a:t>Hosting in Production? Will it be on our servers, the Plesk Server?</a:t>
-            </a:r>
-          </a:p>
-          <a:p>
-            <a:endParaRPr lang="en-US" sz="1600" dirty="0"/>
-          </a:p>
-          <a:p>
-            <a:endParaRPr lang="en-US" sz="1600" dirty="0"/>
-          </a:p>
-          <a:p>
-            <a:endParaRPr lang="en-US" sz="1600" dirty="0"/>
           </a:p>
         </p:txBody>
       </p:sp>
@@ -22194,7 +22434,7 @@
           <p:cNvPr id="4" name="Date Placeholder 3">
             <a:extLst>
               <a:ext uri="{FF2B5EF4-FFF2-40B4-BE49-F238E27FC236}">
-                <a16:creationId xmlns:a16="http://schemas.microsoft.com/office/drawing/2014/main" id="{0464E5E9-411E-07C4-3110-22BA1AEC2085}"/>
+                <a16:creationId xmlns:a16="http://schemas.microsoft.com/office/drawing/2014/main" id="{0B571424-EC9E-7A21-9B23-970252BE4DBD}"/>
               </a:ext>
             </a:extLst>
           </p:cNvPr>
@@ -22212,7 +22452,7 @@
           <a:p>
             <a:fld id="{F0056A89-B657-4E56-81EA-47AEC42B3D30}" type="datetime1">
               <a:rPr lang="en-US" smtClean="0"/>
-              <a:t>8/22/2025</a:t>
+              <a:t>8/25/2025</a:t>
             </a:fld>
             <a:endParaRPr lang="en-US"/>
           </a:p>
@@ -22223,7 +22463,7 @@
           <p:cNvPr id="5" name="Slide Number Placeholder 4">
             <a:extLst>
               <a:ext uri="{FF2B5EF4-FFF2-40B4-BE49-F238E27FC236}">
-                <a16:creationId xmlns:a16="http://schemas.microsoft.com/office/drawing/2014/main" id="{A17B0D9B-FB52-C155-F1D3-7AA4222EDF58}"/>
+                <a16:creationId xmlns:a16="http://schemas.microsoft.com/office/drawing/2014/main" id="{7458EBE5-4507-49D1-B3C0-2F6F2C54305E}"/>
               </a:ext>
             </a:extLst>
           </p:cNvPr>
@@ -22252,7 +22492,7 @@
           <p:cNvPr id="6" name="Title 5">
             <a:extLst>
               <a:ext uri="{FF2B5EF4-FFF2-40B4-BE49-F238E27FC236}">
-                <a16:creationId xmlns:a16="http://schemas.microsoft.com/office/drawing/2014/main" id="{5FA8BF3A-6A4D-772F-8F44-A041873BCF26}"/>
+                <a16:creationId xmlns:a16="http://schemas.microsoft.com/office/drawing/2014/main" id="{026384C2-46C3-2DAA-E672-F688F38E524B}"/>
               </a:ext>
             </a:extLst>
           </p:cNvPr>
@@ -22270,7 +22510,7 @@
           <a:p>
             <a:r>
               <a:rPr lang="en-US" sz="2800" dirty="0"/>
-              <a:t>August Overview - Reports</a:t>
+              <a:t>August Overview – Next Steps</a:t>
             </a:r>
           </a:p>
         </p:txBody>
@@ -22278,7 +22518,7 @@
     </p:spTree>
     <p:extLst>
       <p:ext uri="{BB962C8B-B14F-4D97-AF65-F5344CB8AC3E}">
-        <p14:creationId xmlns:p14="http://schemas.microsoft.com/office/powerpoint/2010/main" val="3735198599"/>
+        <p14:creationId xmlns:p14="http://schemas.microsoft.com/office/powerpoint/2010/main" val="4987962"/>
       </p:ext>
     </p:extLst>
   </p:cSld>
@@ -22403,7 +22643,7 @@
           <a:p>
             <a:fld id="{F0056A89-B657-4E56-81EA-47AEC42B3D30}" type="datetime1">
               <a:rPr lang="en-US" smtClean="0"/>
-              <a:t>8/22/2025</a:t>
+              <a:t>8/25/2025</a:t>
             </a:fld>
             <a:endParaRPr lang="en-US"/>
           </a:p>
@@ -22480,6 +22720,310 @@
 </file>
 
 <file path=ppt/slides/slide6.xml><?xml version="1.0" encoding="utf-8"?>
+<p:sld xmlns:a="http://schemas.openxmlformats.org/drawingml/2006/main" xmlns:r="http://schemas.openxmlformats.org/officeDocument/2006/relationships" xmlns:p="http://schemas.openxmlformats.org/presentationml/2006/main">
+  <p:cSld>
+    <p:bg>
+      <p:bgPr>
+        <a:solidFill>
+          <a:schemeClr val="accent5">
+            <a:lumMod val="20000"/>
+            <a:lumOff val="80000"/>
+          </a:schemeClr>
+        </a:solidFill>
+        <a:effectLst/>
+      </p:bgPr>
+    </p:bg>
+    <p:spTree>
+      <p:nvGrpSpPr>
+        <p:cNvPr id="1" name="">
+          <a:extLst>
+            <a:ext uri="{FF2B5EF4-FFF2-40B4-BE49-F238E27FC236}">
+              <a16:creationId xmlns:a16="http://schemas.microsoft.com/office/drawing/2014/main" id="{43B94313-19C3-7CAB-4AAF-F80F30DFBEE4}"/>
+            </a:ext>
+          </a:extLst>
+        </p:cNvPr>
+        <p:cNvGrpSpPr/>
+        <p:nvPr/>
+      </p:nvGrpSpPr>
+      <p:grpSpPr>
+        <a:xfrm>
+          <a:off x="0" y="0"/>
+          <a:ext cx="0" cy="0"/>
+          <a:chOff x="0" y="0"/>
+          <a:chExt cx="0" cy="0"/>
+        </a:xfrm>
+      </p:grpSpPr>
+      <p:sp>
+        <p:nvSpPr>
+          <p:cNvPr id="2" name="Content Placeholder 1">
+            <a:extLst>
+              <a:ext uri="{FF2B5EF4-FFF2-40B4-BE49-F238E27FC236}">
+                <a16:creationId xmlns:a16="http://schemas.microsoft.com/office/drawing/2014/main" id="{554C6B74-1C65-FFA8-999F-F4BFEB75A80A}"/>
+              </a:ext>
+            </a:extLst>
+          </p:cNvPr>
+          <p:cNvSpPr>
+            <a:spLocks noGrp="1"/>
+          </p:cNvSpPr>
+          <p:nvPr>
+            <p:ph sz="half" idx="1"/>
+          </p:nvPr>
+        </p:nvSpPr>
+        <p:spPr>
+          <a:xfrm>
+            <a:off x="598503" y="782425"/>
+            <a:ext cx="11017391" cy="5394538"/>
+          </a:xfrm>
+        </p:spPr>
+        <p:txBody>
+          <a:bodyPr>
+            <a:normAutofit fontScale="55000" lnSpcReduction="20000"/>
+          </a:bodyPr>
+          <a:lstStyle/>
+          <a:p>
+            <a:r>
+              <a:rPr lang="en-US" sz="1600" dirty="0"/>
+              <a:t>Architecture </a:t>
+            </a:r>
+          </a:p>
+          <a:p>
+            <a:r>
+              <a:rPr lang="en-US" sz="1600" dirty="0"/>
+              <a:t>SAD</a:t>
+            </a:r>
+          </a:p>
+          <a:p>
+            <a:r>
+              <a:rPr lang="en-US" sz="1600" dirty="0"/>
+              <a:t>User Flows</a:t>
+            </a:r>
+          </a:p>
+          <a:p>
+            <a:r>
+              <a:rPr lang="en-US" sz="1600" dirty="0"/>
+              <a:t>API Data Flow</a:t>
+            </a:r>
+          </a:p>
+          <a:p>
+            <a:r>
+              <a:rPr lang="en-US" sz="1600" dirty="0"/>
+              <a:t>ERD Core Entities</a:t>
+            </a:r>
+          </a:p>
+          <a:p>
+            <a:r>
+              <a:rPr lang="en-US" sz="1600" dirty="0"/>
+              <a:t>Security Flow</a:t>
+            </a:r>
+          </a:p>
+          <a:p>
+            <a:r>
+              <a:rPr lang="en-US" sz="1600" dirty="0"/>
+              <a:t>Integration Diagram</a:t>
+            </a:r>
+          </a:p>
+          <a:p>
+            <a:r>
+              <a:rPr lang="en-US" sz="1600" dirty="0"/>
+              <a:t>Database Schema</a:t>
+            </a:r>
+          </a:p>
+          <a:p>
+            <a:endParaRPr lang="en-US" sz="1600" dirty="0"/>
+          </a:p>
+          <a:p>
+            <a:endParaRPr lang="en-US" sz="1600" dirty="0"/>
+          </a:p>
+          <a:p>
+            <a:endParaRPr lang="en-US" sz="1600" dirty="0"/>
+          </a:p>
+          <a:p>
+            <a:endParaRPr lang="en-US" sz="1600" dirty="0"/>
+          </a:p>
+          <a:p>
+            <a:endParaRPr lang="en-US" sz="1600" dirty="0"/>
+          </a:p>
+          <a:p>
+            <a:endParaRPr lang="en-US" sz="1600" dirty="0"/>
+          </a:p>
+          <a:p>
+            <a:endParaRPr lang="en-US" sz="1600" dirty="0"/>
+          </a:p>
+          <a:p>
+            <a:endParaRPr lang="en-US" sz="1600" dirty="0"/>
+          </a:p>
+          <a:p>
+            <a:r>
+              <a:rPr lang="en-US" sz="1600" dirty="0"/>
+              <a:t>Comprehensive Test Scenarios Analysis.md</a:t>
+            </a:r>
+          </a:p>
+          <a:p>
+            <a:r>
+              <a:rPr lang="en-US" sz="1600" dirty="0"/>
+              <a:t>Test Execution Results Analysis</a:t>
+            </a:r>
+          </a:p>
+          <a:p>
+            <a:r>
+              <a:rPr lang="en-US" sz="1200" dirty="0"/>
+              <a:t>Deployment and Data Migration Plan</a:t>
+            </a:r>
+          </a:p>
+          <a:p>
+            <a:endParaRPr lang="en-US" sz="1200" dirty="0"/>
+          </a:p>
+          <a:p>
+            <a:r>
+              <a:rPr lang="en-US" sz="1200" dirty="0">
+                <a:solidFill>
+                  <a:srgbClr val="FF0000"/>
+                </a:solidFill>
+              </a:rPr>
+              <a:t>2FA Setup Guide</a:t>
+            </a:r>
+          </a:p>
+          <a:p>
+            <a:r>
+              <a:rPr lang="en-US" sz="1200" dirty="0">
+                <a:solidFill>
+                  <a:srgbClr val="FF0000"/>
+                </a:solidFill>
+              </a:rPr>
+              <a:t>Docker deployment guide</a:t>
+            </a:r>
+          </a:p>
+          <a:p>
+            <a:r>
+              <a:rPr lang="en-US" sz="1200" dirty="0">
+                <a:solidFill>
+                  <a:srgbClr val="FF0000"/>
+                </a:solidFill>
+              </a:rPr>
+              <a:t>Plesk deployment guide</a:t>
+            </a:r>
+          </a:p>
+          <a:p>
+            <a:r>
+              <a:rPr lang="en-US" sz="1200" dirty="0">
+                <a:solidFill>
+                  <a:srgbClr val="FF0000"/>
+                </a:solidFill>
+              </a:rPr>
+              <a:t>Hosting in Production? Will it be on our servers, the Plesk Server?</a:t>
+            </a:r>
+          </a:p>
+          <a:p>
+            <a:endParaRPr lang="en-US" sz="1600" dirty="0"/>
+          </a:p>
+          <a:p>
+            <a:endParaRPr lang="en-US" sz="1600" dirty="0"/>
+          </a:p>
+          <a:p>
+            <a:endParaRPr lang="en-US" sz="1600" dirty="0"/>
+          </a:p>
+        </p:txBody>
+      </p:sp>
+      <p:sp>
+        <p:nvSpPr>
+          <p:cNvPr id="4" name="Date Placeholder 3">
+            <a:extLst>
+              <a:ext uri="{FF2B5EF4-FFF2-40B4-BE49-F238E27FC236}">
+                <a16:creationId xmlns:a16="http://schemas.microsoft.com/office/drawing/2014/main" id="{0464E5E9-411E-07C4-3110-22BA1AEC2085}"/>
+              </a:ext>
+            </a:extLst>
+          </p:cNvPr>
+          <p:cNvSpPr>
+            <a:spLocks noGrp="1"/>
+          </p:cNvSpPr>
+          <p:nvPr>
+            <p:ph type="dt" sz="half" idx="10"/>
+          </p:nvPr>
+        </p:nvSpPr>
+        <p:spPr/>
+        <p:txBody>
+          <a:bodyPr/>
+          <a:lstStyle/>
+          <a:p>
+            <a:fld id="{F0056A89-B657-4E56-81EA-47AEC42B3D30}" type="datetime1">
+              <a:rPr lang="en-US" smtClean="0"/>
+              <a:t>8/25/2025</a:t>
+            </a:fld>
+            <a:endParaRPr lang="en-US"/>
+          </a:p>
+        </p:txBody>
+      </p:sp>
+      <p:sp>
+        <p:nvSpPr>
+          <p:cNvPr id="5" name="Slide Number Placeholder 4">
+            <a:extLst>
+              <a:ext uri="{FF2B5EF4-FFF2-40B4-BE49-F238E27FC236}">
+                <a16:creationId xmlns:a16="http://schemas.microsoft.com/office/drawing/2014/main" id="{A17B0D9B-FB52-C155-F1D3-7AA4222EDF58}"/>
+              </a:ext>
+            </a:extLst>
+          </p:cNvPr>
+          <p:cNvSpPr>
+            <a:spLocks noGrp="1"/>
+          </p:cNvSpPr>
+          <p:nvPr>
+            <p:ph type="sldNum" sz="quarter" idx="12"/>
+          </p:nvPr>
+        </p:nvSpPr>
+        <p:spPr/>
+        <p:txBody>
+          <a:bodyPr/>
+          <a:lstStyle/>
+          <a:p>
+            <a:fld id="{330EA680-D336-4FF7-8B7A-9848BB0A1C32}" type="slidenum">
+              <a:rPr lang="en-US" smtClean="0"/>
+              <a:t>6</a:t>
+            </a:fld>
+            <a:endParaRPr lang="en-US"/>
+          </a:p>
+        </p:txBody>
+      </p:sp>
+      <p:sp>
+        <p:nvSpPr>
+          <p:cNvPr id="6" name="Title 5">
+            <a:extLst>
+              <a:ext uri="{FF2B5EF4-FFF2-40B4-BE49-F238E27FC236}">
+                <a16:creationId xmlns:a16="http://schemas.microsoft.com/office/drawing/2014/main" id="{5FA8BF3A-6A4D-772F-8F44-A041873BCF26}"/>
+              </a:ext>
+            </a:extLst>
+          </p:cNvPr>
+          <p:cNvSpPr>
+            <a:spLocks noGrp="1"/>
+          </p:cNvSpPr>
+          <p:nvPr>
+            <p:ph type="title"/>
+          </p:nvPr>
+        </p:nvSpPr>
+        <p:spPr/>
+        <p:txBody>
+          <a:bodyPr/>
+          <a:lstStyle/>
+          <a:p>
+            <a:r>
+              <a:rPr lang="en-US" sz="2800" dirty="0"/>
+              <a:t>August Overview - Reports</a:t>
+            </a:r>
+          </a:p>
+        </p:txBody>
+      </p:sp>
+    </p:spTree>
+    <p:extLst>
+      <p:ext uri="{BB962C8B-B14F-4D97-AF65-F5344CB8AC3E}">
+        <p14:creationId xmlns:p14="http://schemas.microsoft.com/office/powerpoint/2010/main" val="3735198599"/>
+      </p:ext>
+    </p:extLst>
+  </p:cSld>
+  <p:clrMapOvr>
+    <a:masterClrMapping/>
+  </p:clrMapOvr>
+</p:sld>
+</file>
+
+<file path=ppt/slides/slide7.xml><?xml version="1.0" encoding="utf-8"?>
 <p:sld xmlns:a="http://schemas.openxmlformats.org/drawingml/2006/main" xmlns:r="http://schemas.openxmlformats.org/officeDocument/2006/relationships" xmlns:p="http://schemas.openxmlformats.org/presentationml/2006/main">
   <p:cSld>
     <p:spTree>
@@ -22572,7 +23116,7 @@
           <a:p>
             <a:fld id="{F0056A89-B657-4E56-81EA-47AEC42B3D30}" type="datetime1">
               <a:rPr lang="en-US" smtClean="0"/>
-              <a:t>8/21/2025</a:t>
+              <a:t>8/25/2025</a:t>
             </a:fld>
             <a:endParaRPr lang="en-US"/>
           </a:p>
@@ -22601,7 +23145,7 @@
           <a:p>
             <a:fld id="{330EA680-D336-4FF7-8B7A-9848BB0A1C32}" type="slidenum">
               <a:rPr lang="en-US" smtClean="0"/>
-              <a:t>6</a:t>
+              <a:t>7</a:t>
             </a:fld>
             <a:endParaRPr lang="en-US" dirty="0"/>
           </a:p>
@@ -24129,7 +24673,7 @@
 </p:sld>
 </file>
 
-<file path=ppt/slides/slide7.xml><?xml version="1.0" encoding="utf-8"?>
+<file path=ppt/slides/slide8.xml><?xml version="1.0" encoding="utf-8"?>
 <p:sld xmlns:a="http://schemas.openxmlformats.org/drawingml/2006/main" xmlns:r="http://schemas.openxmlformats.org/officeDocument/2006/relationships" xmlns:p="http://schemas.openxmlformats.org/presentationml/2006/main">
   <p:cSld>
     <p:spTree>
@@ -24281,7 +24825,7 @@
                   <a:spcPts val="600"/>
                 </a:spcAft>
               </a:pPr>
-              <a:t>8/21/2025</a:t>
+              <a:t>8/25/2025</a:t>
             </a:fld>
             <a:endParaRPr lang="en-US"/>
           </a:p>
@@ -24327,7 +24871,7 @@
                   <a:spcPts val="600"/>
                 </a:spcAft>
               </a:pPr>
-              <a:t>7</a:t>
+              <a:t>8</a:t>
             </a:fld>
             <a:endParaRPr lang="en-US"/>
           </a:p>
@@ -24498,7 +25042,7 @@
 </p:sld>
 </file>
 
-<file path=ppt/slides/slide8.xml><?xml version="1.0" encoding="utf-8"?>
+<file path=ppt/slides/slide9.xml><?xml version="1.0" encoding="utf-8"?>
 <p:sld xmlns:a="http://schemas.openxmlformats.org/drawingml/2006/main" xmlns:r="http://schemas.openxmlformats.org/officeDocument/2006/relationships" xmlns:p="http://schemas.openxmlformats.org/presentationml/2006/main">
   <p:cSld>
     <p:spTree>
@@ -24648,7 +25192,7 @@
           <a:p>
             <a:fld id="{F0056A89-B657-4E56-81EA-47AEC42B3D30}" type="datetime1">
               <a:rPr lang="en-US" smtClean="0"/>
-              <a:t>8/21/2025</a:t>
+              <a:t>8/25/2025</a:t>
             </a:fld>
             <a:endParaRPr lang="en-US" dirty="0"/>
           </a:p>
@@ -24677,7 +25221,7 @@
           <a:p>
             <a:fld id="{330EA680-D336-4FF7-8B7A-9848BB0A1C32}" type="slidenum">
               <a:rPr lang="en-US" smtClean="0"/>
-              <a:t>8</a:t>
+              <a:t>9</a:t>
             </a:fld>
             <a:endParaRPr lang="en-US"/>
           </a:p>
@@ -24755,243 +25299,6 @@
     <p:extLst>
       <p:ext uri="{BB962C8B-B14F-4D97-AF65-F5344CB8AC3E}">
         <p14:creationId xmlns:p14="http://schemas.microsoft.com/office/powerpoint/2010/main" val="65312852"/>
-      </p:ext>
-    </p:extLst>
-  </p:cSld>
-  <p:clrMapOvr>
-    <a:masterClrMapping/>
-  </p:clrMapOvr>
-</p:sld>
-</file>
-
-<file path=ppt/slides/slide9.xml><?xml version="1.0" encoding="utf-8"?>
-<p:sld xmlns:a="http://schemas.openxmlformats.org/drawingml/2006/main" xmlns:r="http://schemas.openxmlformats.org/officeDocument/2006/relationships" xmlns:p="http://schemas.openxmlformats.org/presentationml/2006/main">
-  <p:cSld>
-    <p:spTree>
-      <p:nvGrpSpPr>
-        <p:cNvPr id="1" name="">
-          <a:extLst>
-            <a:ext uri="{FF2B5EF4-FFF2-40B4-BE49-F238E27FC236}">
-              <a16:creationId xmlns:a16="http://schemas.microsoft.com/office/drawing/2014/main" id="{03092A39-4808-D1C5-1C2D-4C77A0CBAED9}"/>
-            </a:ext>
-          </a:extLst>
-        </p:cNvPr>
-        <p:cNvGrpSpPr/>
-        <p:nvPr/>
-      </p:nvGrpSpPr>
-      <p:grpSpPr>
-        <a:xfrm>
-          <a:off x="0" y="0"/>
-          <a:ext cx="0" cy="0"/>
-          <a:chOff x="0" y="0"/>
-          <a:chExt cx="0" cy="0"/>
-        </a:xfrm>
-      </p:grpSpPr>
-      <p:sp>
-        <p:nvSpPr>
-          <p:cNvPr id="2" name="Content Placeholder 1">
-            <a:extLst>
-              <a:ext uri="{FF2B5EF4-FFF2-40B4-BE49-F238E27FC236}">
-                <a16:creationId xmlns:a16="http://schemas.microsoft.com/office/drawing/2014/main" id="{57E0CA37-DE69-39D8-9201-259F23020AD7}"/>
-              </a:ext>
-            </a:extLst>
-          </p:cNvPr>
-          <p:cNvSpPr>
-            <a:spLocks noGrp="1"/>
-          </p:cNvSpPr>
-          <p:nvPr>
-            <p:ph sz="half" idx="1"/>
-          </p:nvPr>
-        </p:nvSpPr>
-        <p:spPr>
-          <a:xfrm>
-            <a:off x="598503" y="782425"/>
-            <a:ext cx="11017391" cy="5394538"/>
-          </a:xfrm>
-        </p:spPr>
-        <p:txBody>
-          <a:bodyPr>
-            <a:normAutofit/>
-          </a:bodyPr>
-          <a:lstStyle/>
-          <a:p>
-            <a:r>
-              <a:rPr lang="en-US" sz="1600" dirty="0"/>
-              <a:t>The adjusted timeline provides:</a:t>
-            </a:r>
-          </a:p>
-          <a:p>
-            <a:pPr lvl="1"/>
-            <a:r>
-              <a:rPr lang="en-US" sz="1600" dirty="0"/>
-              <a:t>Adequate time for comprehensive development of expanded features</a:t>
-            </a:r>
-          </a:p>
-          <a:p>
-            <a:pPr lvl="1"/>
-            <a:r>
-              <a:rPr lang="en-US" sz="1600" dirty="0"/>
-              <a:t>Proper testing cycles for the enhanced functionality</a:t>
-            </a:r>
-          </a:p>
-          <a:p>
-            <a:pPr lvl="1"/>
-            <a:r>
-              <a:rPr lang="en-US" sz="1600" dirty="0"/>
-              <a:t>Quality assurance for the more complex integrations</a:t>
-            </a:r>
-          </a:p>
-          <a:p>
-            <a:pPr lvl="1"/>
-            <a:r>
-              <a:rPr lang="en-US" sz="1600" dirty="0"/>
-              <a:t>Stakeholder alignment on enhanced deliverables</a:t>
-            </a:r>
-            <a:br>
-              <a:rPr lang="en-US" sz="1600" dirty="0"/>
-            </a:br>
-            <a:endParaRPr lang="en-US" sz="1600" dirty="0"/>
-          </a:p>
-          <a:p>
-            <a:r>
-              <a:rPr lang="en-US" sz="1600" dirty="0"/>
-              <a:t>Scope Evolution Highlights:</a:t>
-            </a:r>
-          </a:p>
-          <a:p>
-            <a:pPr lvl="1"/>
-            <a:r>
-              <a:rPr lang="en-US" sz="1600" dirty="0"/>
-              <a:t>Enhanced Security Features - MFA, audit logging, role-based permissions</a:t>
-            </a:r>
-          </a:p>
-          <a:p>
-            <a:pPr lvl="1"/>
-            <a:r>
-              <a:rPr lang="en-US" sz="1600" dirty="0"/>
-              <a:t>Advanced User Experience - Infinite scrolling, improved filtering, mobile considerations</a:t>
-            </a:r>
-          </a:p>
-          <a:p>
-            <a:pPr lvl="1"/>
-            <a:r>
-              <a:rPr lang="en-US" sz="1600" dirty="0"/>
-              <a:t>Complex Data Management - Sophisticated product ID handling, multi-partner associations</a:t>
-            </a:r>
-          </a:p>
-          <a:p>
-            <a:pPr lvl="1"/>
-            <a:r>
-              <a:rPr lang="en-US" sz="1600" dirty="0"/>
-              <a:t>Extended User Types - External partners, varied client access models</a:t>
-            </a:r>
-          </a:p>
-          <a:p>
-            <a:pPr marL="0" indent="0">
-              <a:buNone/>
-            </a:pPr>
-            <a:endParaRPr lang="en-US" sz="1600" dirty="0"/>
-          </a:p>
-        </p:txBody>
-      </p:sp>
-      <p:sp>
-        <p:nvSpPr>
-          <p:cNvPr id="4" name="Date Placeholder 3">
-            <a:extLst>
-              <a:ext uri="{FF2B5EF4-FFF2-40B4-BE49-F238E27FC236}">
-                <a16:creationId xmlns:a16="http://schemas.microsoft.com/office/drawing/2014/main" id="{24BF6EDC-B6C6-A099-DEC4-82C079A82EB1}"/>
-              </a:ext>
-            </a:extLst>
-          </p:cNvPr>
-          <p:cNvSpPr>
-            <a:spLocks noGrp="1"/>
-          </p:cNvSpPr>
-          <p:nvPr>
-            <p:ph type="dt" sz="half" idx="10"/>
-          </p:nvPr>
-        </p:nvSpPr>
-        <p:spPr/>
-        <p:txBody>
-          <a:bodyPr/>
-          <a:lstStyle/>
-          <a:p>
-            <a:fld id="{F0056A89-B657-4E56-81EA-47AEC42B3D30}" type="datetime1">
-              <a:rPr lang="en-US" smtClean="0"/>
-              <a:t>8/21/2025</a:t>
-            </a:fld>
-            <a:endParaRPr lang="en-US"/>
-          </a:p>
-        </p:txBody>
-      </p:sp>
-      <p:sp>
-        <p:nvSpPr>
-          <p:cNvPr id="5" name="Slide Number Placeholder 4">
-            <a:extLst>
-              <a:ext uri="{FF2B5EF4-FFF2-40B4-BE49-F238E27FC236}">
-                <a16:creationId xmlns:a16="http://schemas.microsoft.com/office/drawing/2014/main" id="{FAC73A54-41C8-CA0E-841B-8085AE9581BC}"/>
-              </a:ext>
-            </a:extLst>
-          </p:cNvPr>
-          <p:cNvSpPr>
-            <a:spLocks noGrp="1"/>
-          </p:cNvSpPr>
-          <p:nvPr>
-            <p:ph type="sldNum" sz="quarter" idx="12"/>
-          </p:nvPr>
-        </p:nvSpPr>
-        <p:spPr/>
-        <p:txBody>
-          <a:bodyPr/>
-          <a:lstStyle/>
-          <a:p>
-            <a:fld id="{330EA680-D336-4FF7-8B7A-9848BB0A1C32}" type="slidenum">
-              <a:rPr lang="en-US" smtClean="0"/>
-              <a:t>9</a:t>
-            </a:fld>
-            <a:endParaRPr lang="en-US"/>
-          </a:p>
-        </p:txBody>
-      </p:sp>
-      <p:sp>
-        <p:nvSpPr>
-          <p:cNvPr id="6" name="Title 5">
-            <a:extLst>
-              <a:ext uri="{FF2B5EF4-FFF2-40B4-BE49-F238E27FC236}">
-                <a16:creationId xmlns:a16="http://schemas.microsoft.com/office/drawing/2014/main" id="{848E7924-905A-2614-D7A5-32A814ADF2C9}"/>
-              </a:ext>
-            </a:extLst>
-          </p:cNvPr>
-          <p:cNvSpPr>
-            <a:spLocks noGrp="1"/>
-          </p:cNvSpPr>
-          <p:nvPr>
-            <p:ph type="title"/>
-          </p:nvPr>
-        </p:nvSpPr>
-        <p:spPr/>
-        <p:txBody>
-          <a:bodyPr/>
-          <a:lstStyle/>
-          <a:p>
-            <a:r>
-              <a:rPr lang="en-US" sz="2800" dirty="0"/>
-              <a:t>October 17</a:t>
-            </a:r>
-            <a:r>
-              <a:rPr lang="en-US" sz="2800" baseline="30000" dirty="0"/>
-              <a:t>th</a:t>
-            </a:r>
-            <a:r>
-              <a:rPr lang="en-US" sz="2800" dirty="0"/>
-              <a:t> Go-live</a:t>
-            </a:r>
-          </a:p>
-        </p:txBody>
-      </p:sp>
-    </p:spTree>
-    <p:extLst>
-      <p:ext uri="{BB962C8B-B14F-4D97-AF65-F5344CB8AC3E}">
-        <p14:creationId xmlns:p14="http://schemas.microsoft.com/office/powerpoint/2010/main" val="3707748751"/>
       </p:ext>
     </p:extLst>
   </p:cSld>
